--- a/26/Razonamiento con Incertidumbre/Planificación/RAIN_Planificacion.pptx
+++ b/26/Razonamiento con Incertidumbre/Planificación/RAIN_Planificacion.pptx
@@ -2,25 +2,25 @@
 <file path=ppt/presentation.xml><?xml version="1.0" encoding="utf-8"?>
 <p:presentation xmlns:p="http://schemas.openxmlformats.org/presentationml/2006/main">
   <p:sldMasterIdLst>
-    <p:sldMasterId xmlns:r="http://schemas.openxmlformats.org/officeDocument/2006/relationships" id="2147483648" r:id="R2a5688873f9948c9"/>
+    <p:sldMasterId xmlns:r="http://schemas.openxmlformats.org/officeDocument/2006/relationships" id="2147483648" r:id="R6b6270ffab99485e"/>
   </p:sldMasterIdLst>
   <p:notesMasterIdLst>
-    <p:notesMasterId xmlns:r="http://schemas.openxmlformats.org/officeDocument/2006/relationships" r:id="R399780945ad6480f"/>
+    <p:notesMasterId xmlns:r="http://schemas.openxmlformats.org/officeDocument/2006/relationships" r:id="R6ea475be25ac4035"/>
   </p:notesMasterIdLst>
   <p:sldIdLst>
-    <p:sldId xmlns:r="http://schemas.openxmlformats.org/officeDocument/2006/relationships" id="256" r:id="R2649a5bf7b904ddb"/>
-    <p:sldId xmlns:r="http://schemas.openxmlformats.org/officeDocument/2006/relationships" id="257" r:id="Rc2feea5710a04ca7"/>
-    <p:sldId xmlns:r="http://schemas.openxmlformats.org/officeDocument/2006/relationships" id="258" r:id="R059dabd40f794f39"/>
-    <p:sldId xmlns:r="http://schemas.openxmlformats.org/officeDocument/2006/relationships" id="259" r:id="R416d5ffff3dd49a7"/>
-    <p:sldId xmlns:r="http://schemas.openxmlformats.org/officeDocument/2006/relationships" id="260" r:id="R5a24f1165c7c4902"/>
-    <p:sldId xmlns:r="http://schemas.openxmlformats.org/officeDocument/2006/relationships" id="261" r:id="R04552fcee210453e"/>
-    <p:sldId xmlns:r="http://schemas.openxmlformats.org/officeDocument/2006/relationships" id="262" r:id="R28fb70f0b9804d9d"/>
-    <p:sldId xmlns:r="http://schemas.openxmlformats.org/officeDocument/2006/relationships" id="263" r:id="R6bbcce34db524431"/>
-    <p:sldId xmlns:r="http://schemas.openxmlformats.org/officeDocument/2006/relationships" id="264" r:id="Rfdd4ec237059422f"/>
-    <p:sldId xmlns:r="http://schemas.openxmlformats.org/officeDocument/2006/relationships" id="265" r:id="R408b05a2d4094ce0"/>
-    <p:sldId xmlns:r="http://schemas.openxmlformats.org/officeDocument/2006/relationships" id="266" r:id="Rde77049d52314f69"/>
-    <p:sldId xmlns:r="http://schemas.openxmlformats.org/officeDocument/2006/relationships" id="267" r:id="Rfe69a3fbbb3f4b36"/>
-    <p:sldId xmlns:r="http://schemas.openxmlformats.org/officeDocument/2006/relationships" id="268" r:id="Rb4a546f987234d3f"/>
+    <p:sldId xmlns:r="http://schemas.openxmlformats.org/officeDocument/2006/relationships" id="256" r:id="R7a5c3b36370b4b79"/>
+    <p:sldId xmlns:r="http://schemas.openxmlformats.org/officeDocument/2006/relationships" id="257" r:id="R4b78d72f557e4d23"/>
+    <p:sldId xmlns:r="http://schemas.openxmlformats.org/officeDocument/2006/relationships" id="258" r:id="R08876a2740054b9c"/>
+    <p:sldId xmlns:r="http://schemas.openxmlformats.org/officeDocument/2006/relationships" id="259" r:id="R6873cad084e8432c"/>
+    <p:sldId xmlns:r="http://schemas.openxmlformats.org/officeDocument/2006/relationships" id="260" r:id="Rdbfe24078aef4c98"/>
+    <p:sldId xmlns:r="http://schemas.openxmlformats.org/officeDocument/2006/relationships" id="261" r:id="R952e2d4ecd5a40f2"/>
+    <p:sldId xmlns:r="http://schemas.openxmlformats.org/officeDocument/2006/relationships" id="262" r:id="R4554e21819d14521"/>
+    <p:sldId xmlns:r="http://schemas.openxmlformats.org/officeDocument/2006/relationships" id="263" r:id="R3efc0ef01a064288"/>
+    <p:sldId xmlns:r="http://schemas.openxmlformats.org/officeDocument/2006/relationships" id="264" r:id="R50f45ba5a64541a1"/>
+    <p:sldId xmlns:r="http://schemas.openxmlformats.org/officeDocument/2006/relationships" id="265" r:id="R76471bad4090463f"/>
+    <p:sldId xmlns:r="http://schemas.openxmlformats.org/officeDocument/2006/relationships" id="266" r:id="R9ed96c3ad18e49c9"/>
+    <p:sldId xmlns:r="http://schemas.openxmlformats.org/officeDocument/2006/relationships" id="267" r:id="R14691ca826244383"/>
+    <p:sldId xmlns:r="http://schemas.openxmlformats.org/officeDocument/2006/relationships" id="268" r:id="Rf544d2a0189644c4"/>
   </p:sldIdLst>
   <p:sldSz cx="12192000" cy="6858000"/>
   <p:notesSz cx="6858000" cy="9144000"/>
@@ -1362,7 +1362,7 @@
   </p:cSld>
   <p:clrMap bg1="lt1" tx1="dk1" bg2="lt2" tx2="dk2" accent1="accent1" accent2="accent2" accent3="accent3" accent4="accent4" accent5="accent5" accent6="accent6" hlink="hlink" folHlink="folHlink"/>
   <p:sldLayoutIdLst>
-    <p:sldLayoutId xmlns:r="http://schemas.openxmlformats.org/officeDocument/2006/relationships" id="2147483649" r:id="R10c5d2e02fb54a9e"/>
+    <p:sldLayoutId xmlns:r="http://schemas.openxmlformats.org/officeDocument/2006/relationships" id="2147483649" r:id="R2f32c590a1024725"/>
   </p:sldLayoutIdLst>
   <p:txStyles>
     <p:titleStyle>
@@ -1913,7 +1913,7 @@
           <p:cNvPr id="8" name="">
             <a:extLst xmlns:a="http://schemas.openxmlformats.org/drawingml/2006/main">
               <a:ext uri="{FF2B5EF4-FFF2-40B4-BE49-F238E27FC236}">
-                <a16:creationId xmlns:a16="http://schemas.microsoft.com/office/drawing/2014/main" id="{4D657578-EC20-4486-8792-1F8829AEB180}"/>
+                <a16:creationId xmlns:a16="http://schemas.microsoft.com/office/drawing/2014/main" id="{AAB97A16-AD2D-45A8-B0DF-AA7DECDCB64F}"/>
               </a:ext>
             </a:extLst>
           </p:cNvPr>
@@ -1943,7 +1943,7 @@
           <p:cNvPr id="2" name="">
             <a:extLst xmlns:a="http://schemas.openxmlformats.org/drawingml/2006/main">
               <a:ext uri="{FF2B5EF4-FFF2-40B4-BE49-F238E27FC236}">
-                <a16:creationId xmlns:a16="http://schemas.microsoft.com/office/drawing/2014/main" id="{8C581A05-606A-4E73-B12E-32A0CC11B92E}"/>
+                <a16:creationId xmlns:a16="http://schemas.microsoft.com/office/drawing/2014/main" id="{B8AAE8A1-14E3-4DF6-9F1F-95F244DC4418}"/>
               </a:ext>
             </a:extLst>
           </p:cNvPr>
@@ -1973,7 +1973,7 @@
           <p:cNvPr id="3" name="">
             <a:extLst xmlns:a="http://schemas.openxmlformats.org/drawingml/2006/main">
               <a:ext uri="{FF2B5EF4-FFF2-40B4-BE49-F238E27FC236}">
-                <a16:creationId xmlns:a16="http://schemas.microsoft.com/office/drawing/2014/main" id="{FF4CD500-69DB-4F3C-B1E1-C68CF0476E4C}"/>
+                <a16:creationId xmlns:a16="http://schemas.microsoft.com/office/drawing/2014/main" id="{D814A714-2ACA-47C4-B363-3506A6B52770}"/>
               </a:ext>
             </a:extLst>
           </p:cNvPr>
@@ -2030,7 +2030,7 @@
           <p:cNvPr id="4" name="">
             <a:extLst xmlns:a="http://schemas.openxmlformats.org/drawingml/2006/main">
               <a:ext uri="{FF2B5EF4-FFF2-40B4-BE49-F238E27FC236}">
-                <a16:creationId xmlns:a16="http://schemas.microsoft.com/office/drawing/2014/main" id="{65034894-E3F4-493C-8101-E281D6ED71BE}"/>
+                <a16:creationId xmlns:a16="http://schemas.microsoft.com/office/drawing/2014/main" id="{52D24440-8556-43E5-AFB8-7106500C3F2B}"/>
               </a:ext>
             </a:extLst>
           </p:cNvPr>
@@ -2087,7 +2087,7 @@
           <p:cNvPr id="5" name="">
             <a:extLst xmlns:a="http://schemas.openxmlformats.org/drawingml/2006/main">
               <a:ext uri="{FF2B5EF4-FFF2-40B4-BE49-F238E27FC236}">
-                <a16:creationId xmlns:a16="http://schemas.microsoft.com/office/drawing/2014/main" id="{1195E499-9988-4DF5-89D1-26D902D67368}"/>
+                <a16:creationId xmlns:a16="http://schemas.microsoft.com/office/drawing/2014/main" id="{CE2DCEDA-C903-469B-9098-0C5E897F7DC6}"/>
               </a:ext>
             </a:extLst>
           </p:cNvPr>
@@ -2144,7 +2144,7 @@
           <p:cNvPr id="6" name="">
             <a:extLst xmlns:a="http://schemas.openxmlformats.org/drawingml/2006/main">
               <a:ext uri="{FF2B5EF4-FFF2-40B4-BE49-F238E27FC236}">
-                <a16:creationId xmlns:a16="http://schemas.microsoft.com/office/drawing/2014/main" id="{960000F4-0192-4A92-9D91-6F2BA12C5190}"/>
+                <a16:creationId xmlns:a16="http://schemas.microsoft.com/office/drawing/2014/main" id="{6B70F6B7-ED79-4C6B-B379-D8563E607267}"/>
               </a:ext>
             </a:extLst>
           </p:cNvPr>
@@ -2201,7 +2201,7 @@
           <p:cNvPr id="7" name="">
             <a:extLst xmlns:a="http://schemas.openxmlformats.org/drawingml/2006/main">
               <a:ext uri="{FF2B5EF4-FFF2-40B4-BE49-F238E27FC236}">
-                <a16:creationId xmlns:a16="http://schemas.microsoft.com/office/drawing/2014/main" id="{8A063821-EC48-48F5-9366-F949133B6231}"/>
+                <a16:creationId xmlns:a16="http://schemas.microsoft.com/office/drawing/2014/main" id="{3FC29CFB-A300-4903-A8CD-3A76670440C2}"/>
               </a:ext>
             </a:extLst>
           </p:cNvPr>
@@ -2256,7 +2256,7 @@
     </p:spTree>
     <p:extLst>
       <p:ext uri="{BB962C8B-B14F-4D97-AF65-F5344CB8AC3E}">
-        <p14:creationId xmlns:p14="http://schemas.microsoft.com/office/powerpoint/2010/main" val="1004563025"/>
+        <p14:creationId xmlns:p14="http://schemas.microsoft.com/office/powerpoint/2010/main" val="1721896526"/>
       </p:ext>
     </p:extLst>
   </p:cSld>
@@ -2287,7 +2287,7 @@
           <p:cNvPr id="10" name="">
             <a:extLst xmlns:a="http://schemas.openxmlformats.org/drawingml/2006/main">
               <a:ext uri="{FF2B5EF4-FFF2-40B4-BE49-F238E27FC236}">
-                <a16:creationId xmlns:a16="http://schemas.microsoft.com/office/drawing/2014/main" id="{90317835-D36F-4C8F-AB87-23C3DBD6B3C3}"/>
+                <a16:creationId xmlns:a16="http://schemas.microsoft.com/office/drawing/2014/main" id="{4E0BD748-AC84-40A9-853B-9E3100A7198B}"/>
               </a:ext>
             </a:extLst>
           </p:cNvPr>
@@ -2317,7 +2317,7 @@
           <p:cNvPr id="2" name="">
             <a:extLst xmlns:a="http://schemas.openxmlformats.org/drawingml/2006/main">
               <a:ext uri="{FF2B5EF4-FFF2-40B4-BE49-F238E27FC236}">
-                <a16:creationId xmlns:a16="http://schemas.microsoft.com/office/drawing/2014/main" id="{35A56967-FF84-47FC-9D11-7181AE9CDBC0}"/>
+                <a16:creationId xmlns:a16="http://schemas.microsoft.com/office/drawing/2014/main" id="{C3B75301-34E3-4DF8-8200-46491B2D122E}"/>
               </a:ext>
             </a:extLst>
           </p:cNvPr>
@@ -2347,7 +2347,7 @@
           <p:cNvPr id="3" name="">
             <a:extLst xmlns:a="http://schemas.openxmlformats.org/drawingml/2006/main">
               <a:ext uri="{FF2B5EF4-FFF2-40B4-BE49-F238E27FC236}">
-                <a16:creationId xmlns:a16="http://schemas.microsoft.com/office/drawing/2014/main" id="{F99FD895-1D93-42D9-AE4A-C5D81EDB4787}"/>
+                <a16:creationId xmlns:a16="http://schemas.microsoft.com/office/drawing/2014/main" id="{52FE520E-4CB2-4C81-A4A2-F946A322C4CC}"/>
               </a:ext>
             </a:extLst>
           </p:cNvPr>
@@ -2404,7 +2404,7 @@
           <p:cNvPr id="4" name="">
             <a:extLst xmlns:a="http://schemas.openxmlformats.org/drawingml/2006/main">
               <a:ext uri="{FF2B5EF4-FFF2-40B4-BE49-F238E27FC236}">
-                <a16:creationId xmlns:a16="http://schemas.microsoft.com/office/drawing/2014/main" id="{20D20BC4-98B5-4FE7-81F8-8A6491E5A48E}"/>
+                <a16:creationId xmlns:a16="http://schemas.microsoft.com/office/drawing/2014/main" id="{E95FCDD6-C89C-4304-BDEE-E5EEE05B9275}"/>
               </a:ext>
             </a:extLst>
           </p:cNvPr>
@@ -2461,7 +2461,7 @@
           <p:cNvPr id="5" name="">
             <a:extLst xmlns:a="http://schemas.openxmlformats.org/drawingml/2006/main">
               <a:ext uri="{FF2B5EF4-FFF2-40B4-BE49-F238E27FC236}">
-                <a16:creationId xmlns:a16="http://schemas.microsoft.com/office/drawing/2014/main" id="{AD4748CA-6C1B-4222-A97E-BB00FBE55D43}"/>
+                <a16:creationId xmlns:a16="http://schemas.microsoft.com/office/drawing/2014/main" id="{A873A853-B29E-4486-9B28-E8FC58EB0B60}"/>
               </a:ext>
             </a:extLst>
           </p:cNvPr>
@@ -2518,7 +2518,7 @@
           <p:cNvPr id="6" name="">
             <a:extLst xmlns:a="http://schemas.openxmlformats.org/drawingml/2006/main">
               <a:ext uri="{FF2B5EF4-FFF2-40B4-BE49-F238E27FC236}">
-                <a16:creationId xmlns:a16="http://schemas.microsoft.com/office/drawing/2014/main" id="{0B5D987F-03B3-4D12-9C4F-EE29BD0AD415}"/>
+                <a16:creationId xmlns:a16="http://schemas.microsoft.com/office/drawing/2014/main" id="{B7BD7BE1-A555-4FD8-B49D-41C4169A7BB1}"/>
               </a:ext>
             </a:extLst>
           </p:cNvPr>
@@ -2565,7 +2565,7 @@
                 <a:ea typeface="Arial"/>
                 <a:cs typeface="Arial"/>
               </a:rPr>
-              <a:t>Gantt con incrementos: ejemplo inspirado en Scrum</a:t>
+              <a:t>Gantt organizado en dos incrementos</a:t>
             </a:r>
           </a:p>
         </p:txBody>
@@ -2575,7 +2575,7 @@
           <p:cNvPr id="7" name="">
             <a:extLst xmlns:a="http://schemas.openxmlformats.org/drawingml/2006/main">
               <a:ext uri="{FF2B5EF4-FFF2-40B4-BE49-F238E27FC236}">
-                <a16:creationId xmlns:a16="http://schemas.microsoft.com/office/drawing/2014/main" id="{2D1DA80D-E4A8-4ECE-A4EE-78AAF5D80C2D}"/>
+                <a16:creationId xmlns:a16="http://schemas.microsoft.com/office/drawing/2014/main" id="{08C3F385-1D13-4017-967A-9991815E2D55}"/>
               </a:ext>
             </a:extLst>
           </p:cNvPr>
@@ -2622,7 +2622,7 @@
                 <a:ea typeface="Arial"/>
                 <a:cs typeface="Arial"/>
               </a:rPr>
-              <a:t>1. Prototipo · 2. Entrega final. Adaptación al calendario de la asignatura.</a:t>
+              <a:t>Cada incremento prepara una entrega: prototipo y entrega final.</a:t>
             </a:r>
           </a:p>
         </p:txBody>
@@ -6046,7 +6046,7 @@
           <p:cNvPr id="9" name="">
             <a:extLst xmlns:a="http://schemas.openxmlformats.org/drawingml/2006/main">
               <a:ext uri="{FF2B5EF4-FFF2-40B4-BE49-F238E27FC236}">
-                <a16:creationId xmlns:a16="http://schemas.microsoft.com/office/drawing/2014/main" id="{11FD9B2C-DC96-4CEC-B227-158A4FE9D054}"/>
+                <a16:creationId xmlns:a16="http://schemas.microsoft.com/office/drawing/2014/main" id="{9330E0AF-0DC4-44DD-9254-B0856C36E84D}"/>
               </a:ext>
             </a:extLst>
           </p:cNvPr>
@@ -6101,7 +6101,7 @@
     </p:spTree>
     <p:extLst>
       <p:ext uri="{BB962C8B-B14F-4D97-AF65-F5344CB8AC3E}">
-        <p14:creationId xmlns:p14="http://schemas.microsoft.com/office/powerpoint/2010/main" val="1724759221"/>
+        <p14:creationId xmlns:p14="http://schemas.microsoft.com/office/powerpoint/2010/main" val="1006528478"/>
       </p:ext>
     </p:extLst>
   </p:cSld>
@@ -6132,7 +6132,7 @@
           <p:cNvPr id="10" name="">
             <a:extLst xmlns:a="http://schemas.openxmlformats.org/drawingml/2006/main">
               <a:ext uri="{FF2B5EF4-FFF2-40B4-BE49-F238E27FC236}">
-                <a16:creationId xmlns:a16="http://schemas.microsoft.com/office/drawing/2014/main" id="{E2C4F3DC-684C-4136-8C17-81C7FAF9DA5F}"/>
+                <a16:creationId xmlns:a16="http://schemas.microsoft.com/office/drawing/2014/main" id="{444E440E-9400-482A-8370-4AB50AA70A5E}"/>
               </a:ext>
             </a:extLst>
           </p:cNvPr>
@@ -6162,7 +6162,7 @@
           <p:cNvPr id="2" name="">
             <a:extLst xmlns:a="http://schemas.openxmlformats.org/drawingml/2006/main">
               <a:ext uri="{FF2B5EF4-FFF2-40B4-BE49-F238E27FC236}">
-                <a16:creationId xmlns:a16="http://schemas.microsoft.com/office/drawing/2014/main" id="{4F1ED82E-E8E9-48C0-B1B2-DD1A0C4C0F77}"/>
+                <a16:creationId xmlns:a16="http://schemas.microsoft.com/office/drawing/2014/main" id="{E43BD298-07F0-4605-B13F-A8C7C73D5CA5}"/>
               </a:ext>
             </a:extLst>
           </p:cNvPr>
@@ -6192,7 +6192,7 @@
           <p:cNvPr id="3" name="">
             <a:extLst xmlns:a="http://schemas.openxmlformats.org/drawingml/2006/main">
               <a:ext uri="{FF2B5EF4-FFF2-40B4-BE49-F238E27FC236}">
-                <a16:creationId xmlns:a16="http://schemas.microsoft.com/office/drawing/2014/main" id="{CC36CE6A-0601-4B00-A7F1-86A994633C9B}"/>
+                <a16:creationId xmlns:a16="http://schemas.microsoft.com/office/drawing/2014/main" id="{AD30B45A-C57A-45B9-94F6-4DDB18327AEF}"/>
               </a:ext>
             </a:extLst>
           </p:cNvPr>
@@ -6249,7 +6249,7 @@
           <p:cNvPr id="4" name="">
             <a:extLst xmlns:a="http://schemas.openxmlformats.org/drawingml/2006/main">
               <a:ext uri="{FF2B5EF4-FFF2-40B4-BE49-F238E27FC236}">
-                <a16:creationId xmlns:a16="http://schemas.microsoft.com/office/drawing/2014/main" id="{9A0DAB55-4F94-4A79-9D4B-0A041F0AF801}"/>
+                <a16:creationId xmlns:a16="http://schemas.microsoft.com/office/drawing/2014/main" id="{4244F64E-02AB-46EF-B36A-0978E0E2B193}"/>
               </a:ext>
             </a:extLst>
           </p:cNvPr>
@@ -6306,7 +6306,7 @@
           <p:cNvPr id="5" name="">
             <a:extLst xmlns:a="http://schemas.openxmlformats.org/drawingml/2006/main">
               <a:ext uri="{FF2B5EF4-FFF2-40B4-BE49-F238E27FC236}">
-                <a16:creationId xmlns:a16="http://schemas.microsoft.com/office/drawing/2014/main" id="{51E32858-5A1E-441A-8A33-1B1238CB1EC4}"/>
+                <a16:creationId xmlns:a16="http://schemas.microsoft.com/office/drawing/2014/main" id="{A87ABCE8-94A0-4038-BA87-F18D863C6169}"/>
               </a:ext>
             </a:extLst>
           </p:cNvPr>
@@ -6363,7 +6363,7 @@
           <p:cNvPr id="6" name="">
             <a:extLst xmlns:a="http://schemas.openxmlformats.org/drawingml/2006/main">
               <a:ext uri="{FF2B5EF4-FFF2-40B4-BE49-F238E27FC236}">
-                <a16:creationId xmlns:a16="http://schemas.microsoft.com/office/drawing/2014/main" id="{7609D531-D30B-4F5E-8935-475E077FA6E7}"/>
+                <a16:creationId xmlns:a16="http://schemas.microsoft.com/office/drawing/2014/main" id="{E98F7CBF-2E0F-4765-948F-3A414E9ACC28}"/>
               </a:ext>
             </a:extLst>
           </p:cNvPr>
@@ -6410,7 +6410,7 @@
                 <a:ea typeface="Arial"/>
                 <a:cs typeface="Arial"/>
               </a:rPr>
-              <a:t>Gantt sin incrementos: ejemplo por entregas</a:t>
+              <a:t>Gantt organizado por tareas</a:t>
             </a:r>
           </a:p>
         </p:txBody>
@@ -6420,7 +6420,7 @@
           <p:cNvPr id="7" name="">
             <a:extLst xmlns:a="http://schemas.openxmlformats.org/drawingml/2006/main">
               <a:ext uri="{FF2B5EF4-FFF2-40B4-BE49-F238E27FC236}">
-                <a16:creationId xmlns:a16="http://schemas.microsoft.com/office/drawing/2014/main" id="{4B561FF7-C939-4F02-A9C0-4A85CC9BF33F}"/>
+                <a16:creationId xmlns:a16="http://schemas.microsoft.com/office/drawing/2014/main" id="{E5FB3E0A-1669-4E0F-BEC3-C256A2C6E777}"/>
               </a:ext>
             </a:extLst>
           </p:cNvPr>
@@ -6467,7 +6467,7 @@
                 <a:ea typeface="Arial"/>
                 <a:cs typeface="Arial"/>
               </a:rPr>
-              <a:t>Las mismas entregas, organizadas directamente como tareas.</a:t>
+              <a:t>También permite trabajar de forma iterativa, sin agrupar las tareas en incrementos.</a:t>
             </a:r>
           </a:p>
         </p:txBody>
@@ -9215,7 +9215,7 @@
           <p:cNvPr id="9" name="">
             <a:extLst xmlns:a="http://schemas.openxmlformats.org/drawingml/2006/main">
               <a:ext uri="{FF2B5EF4-FFF2-40B4-BE49-F238E27FC236}">
-                <a16:creationId xmlns:a16="http://schemas.microsoft.com/office/drawing/2014/main" id="{178FBAD2-196E-4056-A41F-BAB19868E7D4}"/>
+                <a16:creationId xmlns:a16="http://schemas.microsoft.com/office/drawing/2014/main" id="{C6CFDD1C-26F1-47F8-832F-4A093FB1E58F}"/>
               </a:ext>
             </a:extLst>
           </p:cNvPr>
@@ -9270,7 +9270,7 @@
     </p:spTree>
     <p:extLst>
       <p:ext uri="{BB962C8B-B14F-4D97-AF65-F5344CB8AC3E}">
-        <p14:creationId xmlns:p14="http://schemas.microsoft.com/office/powerpoint/2010/main" val="1057494311"/>
+        <p14:creationId xmlns:p14="http://schemas.microsoft.com/office/powerpoint/2010/main" val="683895465"/>
       </p:ext>
     </p:extLst>
   </p:cSld>
@@ -9301,7 +9301,7 @@
           <p:cNvPr id="10" name="">
             <a:extLst xmlns:a="http://schemas.openxmlformats.org/drawingml/2006/main">
               <a:ext uri="{FF2B5EF4-FFF2-40B4-BE49-F238E27FC236}">
-                <a16:creationId xmlns:a16="http://schemas.microsoft.com/office/drawing/2014/main" id="{866177B2-4685-42A1-9E91-1FC09D5C8C15}"/>
+                <a16:creationId xmlns:a16="http://schemas.microsoft.com/office/drawing/2014/main" id="{2D0E7422-B328-459E-9B90-916180495D6A}"/>
               </a:ext>
             </a:extLst>
           </p:cNvPr>
@@ -9331,7 +9331,7 @@
           <p:cNvPr id="2" name="">
             <a:extLst xmlns:a="http://schemas.openxmlformats.org/drawingml/2006/main">
               <a:ext uri="{FF2B5EF4-FFF2-40B4-BE49-F238E27FC236}">
-                <a16:creationId xmlns:a16="http://schemas.microsoft.com/office/drawing/2014/main" id="{3A7CE969-E060-4E94-A3DE-52DF5B34C69A}"/>
+                <a16:creationId xmlns:a16="http://schemas.microsoft.com/office/drawing/2014/main" id="{56A174BE-6DE1-47CB-897C-83391EAF4BCF}"/>
               </a:ext>
             </a:extLst>
           </p:cNvPr>
@@ -9361,7 +9361,7 @@
           <p:cNvPr id="3" name="">
             <a:extLst xmlns:a="http://schemas.openxmlformats.org/drawingml/2006/main">
               <a:ext uri="{FF2B5EF4-FFF2-40B4-BE49-F238E27FC236}">
-                <a16:creationId xmlns:a16="http://schemas.microsoft.com/office/drawing/2014/main" id="{100F298B-29CC-4809-843E-E699DBE544E1}"/>
+                <a16:creationId xmlns:a16="http://schemas.microsoft.com/office/drawing/2014/main" id="{C0C4336A-C6BE-44E0-AB21-D56DC482BE20}"/>
               </a:ext>
             </a:extLst>
           </p:cNvPr>
@@ -9418,7 +9418,7 @@
           <p:cNvPr id="4" name="">
             <a:extLst xmlns:a="http://schemas.openxmlformats.org/drawingml/2006/main">
               <a:ext uri="{FF2B5EF4-FFF2-40B4-BE49-F238E27FC236}">
-                <a16:creationId xmlns:a16="http://schemas.microsoft.com/office/drawing/2014/main" id="{B18D0118-7E09-4BA4-86AB-AA1FBE9AA779}"/>
+                <a16:creationId xmlns:a16="http://schemas.microsoft.com/office/drawing/2014/main" id="{940918B2-DF14-4438-BA75-F6D47DB35EEB}"/>
               </a:ext>
             </a:extLst>
           </p:cNvPr>
@@ -9475,7 +9475,7 @@
           <p:cNvPr id="5" name="">
             <a:extLst xmlns:a="http://schemas.openxmlformats.org/drawingml/2006/main">
               <a:ext uri="{FF2B5EF4-FFF2-40B4-BE49-F238E27FC236}">
-                <a16:creationId xmlns:a16="http://schemas.microsoft.com/office/drawing/2014/main" id="{0127B9E2-AB54-43BD-AF2C-6B926D8B1AB1}"/>
+                <a16:creationId xmlns:a16="http://schemas.microsoft.com/office/drawing/2014/main" id="{16111A4F-E46E-46BB-B2DC-16BC6DCC6A8C}"/>
               </a:ext>
             </a:extLst>
           </p:cNvPr>
@@ -9532,7 +9532,7 @@
           <p:cNvPr id="6" name="">
             <a:extLst xmlns:a="http://schemas.openxmlformats.org/drawingml/2006/main">
               <a:ext uri="{FF2B5EF4-FFF2-40B4-BE49-F238E27FC236}">
-                <a16:creationId xmlns:a16="http://schemas.microsoft.com/office/drawing/2014/main" id="{34AD3627-DEF6-41DA-ACA2-2140D8DD4FAC}"/>
+                <a16:creationId xmlns:a16="http://schemas.microsoft.com/office/drawing/2014/main" id="{1F851BD6-77EC-44AB-890D-CFDC29AF6636}"/>
               </a:ext>
             </a:extLst>
           </p:cNvPr>
@@ -9589,7 +9589,7 @@
           <p:cNvPr id="7" name="">
             <a:extLst xmlns:a="http://schemas.openxmlformats.org/drawingml/2006/main">
               <a:ext uri="{FF2B5EF4-FFF2-40B4-BE49-F238E27FC236}">
-                <a16:creationId xmlns:a16="http://schemas.microsoft.com/office/drawing/2014/main" id="{61E49F9C-9CAF-440D-8DD3-9D28C85F599F}"/>
+                <a16:creationId xmlns:a16="http://schemas.microsoft.com/office/drawing/2014/main" id="{FB15703C-DBED-4BF8-9C50-7908DA64CB84}"/>
               </a:ext>
             </a:extLst>
           </p:cNvPr>
@@ -9646,7 +9646,7 @@
           <p:cNvPr id="8" name="">
             <a:extLst xmlns:a="http://schemas.openxmlformats.org/drawingml/2006/main">
               <a:ext uri="{FF2B5EF4-FFF2-40B4-BE49-F238E27FC236}">
-                <a16:creationId xmlns:a16="http://schemas.microsoft.com/office/drawing/2014/main" id="{BC1ABD0F-DC35-4A85-A065-EDE433573B62}"/>
+                <a16:creationId xmlns:a16="http://schemas.microsoft.com/office/drawing/2014/main" id="{FDBFE1E2-3B86-4A19-BEC2-828AEA0FF1F5}"/>
               </a:ext>
             </a:extLst>
           </p:cNvPr>
@@ -9703,7 +9703,7 @@
           <p:cNvPr id="9" name="">
             <a:extLst xmlns:a="http://schemas.openxmlformats.org/drawingml/2006/main">
               <a:ext uri="{FF2B5EF4-FFF2-40B4-BE49-F238E27FC236}">
-                <a16:creationId xmlns:a16="http://schemas.microsoft.com/office/drawing/2014/main" id="{32D41E5C-3C65-4D42-B1DB-A25AD8C6B249}"/>
+                <a16:creationId xmlns:a16="http://schemas.microsoft.com/office/drawing/2014/main" id="{46DEE1B3-E88C-4C37-9040-0187F2BA0D76}"/>
               </a:ext>
             </a:extLst>
           </p:cNvPr>
@@ -9750,7 +9750,7 @@
                 <a:ea typeface="Arial"/>
                 <a:cs typeface="Arial"/>
               </a:rPr>
-              <a:t>Elegid el formato que os resulte más claro. Dividir las tareas en subtareas es opcional.</a:t>
+              <a:t>Podéis organizarlo por tareas o por incrementos. Ambos permiten trabajar de forma iterativa.</a:t>
             </a:r>
           </a:p>
         </p:txBody>
@@ -9758,7 +9758,7 @@
     </p:spTree>
     <p:extLst>
       <p:ext uri="{BB962C8B-B14F-4D97-AF65-F5344CB8AC3E}">
-        <p14:creationId xmlns:p14="http://schemas.microsoft.com/office/powerpoint/2010/main" val="993771205"/>
+        <p14:creationId xmlns:p14="http://schemas.microsoft.com/office/powerpoint/2010/main" val="1935710143"/>
       </p:ext>
     </p:extLst>
   </p:cSld>
@@ -9789,7 +9789,7 @@
           <p:cNvPr id="21" name="">
             <a:extLst xmlns:a="http://schemas.openxmlformats.org/drawingml/2006/main">
               <a:ext uri="{FF2B5EF4-FFF2-40B4-BE49-F238E27FC236}">
-                <a16:creationId xmlns:a16="http://schemas.microsoft.com/office/drawing/2014/main" id="{FA7C19F8-2402-4EC8-8DFD-9C2C2AD6B4E0}"/>
+                <a16:creationId xmlns:a16="http://schemas.microsoft.com/office/drawing/2014/main" id="{4CAAE8EA-2A1F-4FAD-809D-12665B7B0CA7}"/>
               </a:ext>
             </a:extLst>
           </p:cNvPr>
@@ -9819,7 +9819,7 @@
           <p:cNvPr id="2" name="">
             <a:extLst xmlns:a="http://schemas.openxmlformats.org/drawingml/2006/main">
               <a:ext uri="{FF2B5EF4-FFF2-40B4-BE49-F238E27FC236}">
-                <a16:creationId xmlns:a16="http://schemas.microsoft.com/office/drawing/2014/main" id="{3DC1E73C-CF8B-406B-8868-C04535E3E1D6}"/>
+                <a16:creationId xmlns:a16="http://schemas.microsoft.com/office/drawing/2014/main" id="{1D015DC9-3AD4-4CC3-8F08-011FCBC6B003}"/>
               </a:ext>
             </a:extLst>
           </p:cNvPr>
@@ -9849,7 +9849,7 @@
           <p:cNvPr id="3" name="">
             <a:extLst xmlns:a="http://schemas.openxmlformats.org/drawingml/2006/main">
               <a:ext uri="{FF2B5EF4-FFF2-40B4-BE49-F238E27FC236}">
-                <a16:creationId xmlns:a16="http://schemas.microsoft.com/office/drawing/2014/main" id="{3B264E33-A55B-419D-8691-29ABCC24C05E}"/>
+                <a16:creationId xmlns:a16="http://schemas.microsoft.com/office/drawing/2014/main" id="{F66B6E1F-2CF8-4149-B792-906DEFBC5A59}"/>
               </a:ext>
             </a:extLst>
           </p:cNvPr>
@@ -9906,7 +9906,7 @@
           <p:cNvPr id="4" name="">
             <a:extLst xmlns:a="http://schemas.openxmlformats.org/drawingml/2006/main">
               <a:ext uri="{FF2B5EF4-FFF2-40B4-BE49-F238E27FC236}">
-                <a16:creationId xmlns:a16="http://schemas.microsoft.com/office/drawing/2014/main" id="{80CC6F2B-576E-49C9-908C-1D95288715FC}"/>
+                <a16:creationId xmlns:a16="http://schemas.microsoft.com/office/drawing/2014/main" id="{DBFD35F9-B305-4431-A2DF-AC084F72D9E2}"/>
               </a:ext>
             </a:extLst>
           </p:cNvPr>
@@ -9963,7 +9963,7 @@
           <p:cNvPr id="5" name="">
             <a:extLst xmlns:a="http://schemas.openxmlformats.org/drawingml/2006/main">
               <a:ext uri="{FF2B5EF4-FFF2-40B4-BE49-F238E27FC236}">
-                <a16:creationId xmlns:a16="http://schemas.microsoft.com/office/drawing/2014/main" id="{0CC6A676-CB0C-4F8B-95FE-C44D23F3CE0C}"/>
+                <a16:creationId xmlns:a16="http://schemas.microsoft.com/office/drawing/2014/main" id="{5F91B4FC-FD78-481F-AB61-8D86D20BAD08}"/>
               </a:ext>
             </a:extLst>
           </p:cNvPr>
@@ -10020,7 +10020,7 @@
           <p:cNvPr id="6" name="">
             <a:extLst xmlns:a="http://schemas.openxmlformats.org/drawingml/2006/main">
               <a:ext uri="{FF2B5EF4-FFF2-40B4-BE49-F238E27FC236}">
-                <a16:creationId xmlns:a16="http://schemas.microsoft.com/office/drawing/2014/main" id="{B6A2DE87-069D-463C-A2FA-375883DA385F}"/>
+                <a16:creationId xmlns:a16="http://schemas.microsoft.com/office/drawing/2014/main" id="{919FE2C1-D3DE-4837-8FC4-3BED73B8C34A}"/>
               </a:ext>
             </a:extLst>
           </p:cNvPr>
@@ -10077,7 +10077,7 @@
           <p:cNvPr id="7" name="">
             <a:extLst xmlns:a="http://schemas.openxmlformats.org/drawingml/2006/main">
               <a:ext uri="{FF2B5EF4-FFF2-40B4-BE49-F238E27FC236}">
-                <a16:creationId xmlns:a16="http://schemas.microsoft.com/office/drawing/2014/main" id="{A483664B-32FD-41EB-929A-19BA7EDA5471}"/>
+                <a16:creationId xmlns:a16="http://schemas.microsoft.com/office/drawing/2014/main" id="{6BF568DD-94C7-4B56-A834-40876BB22C54}"/>
               </a:ext>
             </a:extLst>
           </p:cNvPr>
@@ -10134,7 +10134,7 @@
           <p:cNvPr id="8" name="">
             <a:extLst xmlns:a="http://schemas.openxmlformats.org/drawingml/2006/main">
               <a:ext uri="{FF2B5EF4-FFF2-40B4-BE49-F238E27FC236}">
-                <a16:creationId xmlns:a16="http://schemas.microsoft.com/office/drawing/2014/main" id="{79C67CCA-11B1-48D5-BC06-040E5EFAFF6F}"/>
+                <a16:creationId xmlns:a16="http://schemas.microsoft.com/office/drawing/2014/main" id="{39C7B760-80E6-4194-A120-A3B8952B3D60}"/>
               </a:ext>
             </a:extLst>
           </p:cNvPr>
@@ -10195,7 +10195,7 @@
           <p:nvPr/>
         </p:nvPicPr>
         <p:blipFill>
-          <a:blip xmlns:r="http://schemas.openxmlformats.org/officeDocument/2006/relationships" xmlns:a="http://schemas.openxmlformats.org/drawingml/2006/main" r:embed="R6fecf32cfcf7447a"/>
+          <a:blip xmlns:r="http://schemas.openxmlformats.org/officeDocument/2006/relationships" xmlns:a="http://schemas.openxmlformats.org/drawingml/2006/main" r:embed="R8bf45439b5c04750"/>
           <a:stretch xmlns:a="http://schemas.openxmlformats.org/drawingml/2006/main"/>
         </p:blipFill>
         <p:spPr>
@@ -10217,7 +10217,7 @@
           <p:nvPr/>
         </p:nvPicPr>
         <p:blipFill>
-          <a:blip xmlns:r="http://schemas.openxmlformats.org/officeDocument/2006/relationships" xmlns:a="http://schemas.openxmlformats.org/drawingml/2006/main" r:embed="R2afa0e0fff574165"/>
+          <a:blip xmlns:r="http://schemas.openxmlformats.org/officeDocument/2006/relationships" xmlns:a="http://schemas.openxmlformats.org/drawingml/2006/main" r:embed="Rdfd74b42006c490d"/>
           <a:stretch xmlns:a="http://schemas.openxmlformats.org/drawingml/2006/main"/>
         </p:blipFill>
         <p:spPr>
@@ -10235,7 +10235,7 @@
           <p:cNvPr id="11" name="">
             <a:extLst xmlns:a="http://schemas.openxmlformats.org/drawingml/2006/main">
               <a:ext uri="{FF2B5EF4-FFF2-40B4-BE49-F238E27FC236}">
-                <a16:creationId xmlns:a16="http://schemas.microsoft.com/office/drawing/2014/main" id="{85A77F50-84B2-43E9-A74D-5A486F9EA67D}"/>
+                <a16:creationId xmlns:a16="http://schemas.microsoft.com/office/drawing/2014/main" id="{21FD4E4F-2FDB-4E20-AF39-540949D66D89}"/>
               </a:ext>
             </a:extLst>
           </p:cNvPr>
@@ -10292,7 +10292,7 @@
           <p:cNvPr id="12" name="">
             <a:extLst xmlns:a="http://schemas.openxmlformats.org/drawingml/2006/main">
               <a:ext uri="{FF2B5EF4-FFF2-40B4-BE49-F238E27FC236}">
-                <a16:creationId xmlns:a16="http://schemas.microsoft.com/office/drawing/2014/main" id="{26B130A2-10FB-45F1-92A0-317C72964510}"/>
+                <a16:creationId xmlns:a16="http://schemas.microsoft.com/office/drawing/2014/main" id="{89ED8DE8-E745-42AF-B320-B1F97DFCC4E3}"/>
               </a:ext>
             </a:extLst>
           </p:cNvPr>
@@ -10349,7 +10349,7 @@
           <p:cNvPr id="13" name="">
             <a:extLst xmlns:a="http://schemas.openxmlformats.org/drawingml/2006/main">
               <a:ext uri="{FF2B5EF4-FFF2-40B4-BE49-F238E27FC236}">
-                <a16:creationId xmlns:a16="http://schemas.microsoft.com/office/drawing/2014/main" id="{840D2950-2A3A-4E4F-97A3-DCE0B63DC98A}"/>
+                <a16:creationId xmlns:a16="http://schemas.microsoft.com/office/drawing/2014/main" id="{64C9AA17-7661-4758-8BFD-9366CB61AFF2}"/>
               </a:ext>
             </a:extLst>
           </p:cNvPr>
@@ -10429,7 +10429,7 @@
           <p:cNvPr id="14" name="">
             <a:extLst xmlns:a="http://schemas.openxmlformats.org/drawingml/2006/main">
               <a:ext uri="{FF2B5EF4-FFF2-40B4-BE49-F238E27FC236}">
-                <a16:creationId xmlns:a16="http://schemas.microsoft.com/office/drawing/2014/main" id="{A778DB0B-F43C-495F-83B1-B55E53587BCB}"/>
+                <a16:creationId xmlns:a16="http://schemas.microsoft.com/office/drawing/2014/main" id="{4E5BD356-ABF0-4A13-980F-68FBC8BC4E08}"/>
               </a:ext>
             </a:extLst>
           </p:cNvPr>
@@ -10486,7 +10486,7 @@
           <p:cNvPr id="15" name="">
             <a:extLst xmlns:a="http://schemas.openxmlformats.org/drawingml/2006/main">
               <a:ext uri="{FF2B5EF4-FFF2-40B4-BE49-F238E27FC236}">
-                <a16:creationId xmlns:a16="http://schemas.microsoft.com/office/drawing/2014/main" id="{0219DC2D-5994-45E7-9A8F-A073C6075C49}"/>
+                <a16:creationId xmlns:a16="http://schemas.microsoft.com/office/drawing/2014/main" id="{193FD16E-9062-4AAE-B54E-E9700BAC0241}"/>
               </a:ext>
             </a:extLst>
           </p:cNvPr>
@@ -10566,7 +10566,7 @@
           <p:cNvPr id="16" name="">
             <a:extLst xmlns:a="http://schemas.openxmlformats.org/drawingml/2006/main">
               <a:ext uri="{FF2B5EF4-FFF2-40B4-BE49-F238E27FC236}">
-                <a16:creationId xmlns:a16="http://schemas.microsoft.com/office/drawing/2014/main" id="{54AF2913-A3D9-4E16-A64F-0A4484C1EF10}"/>
+                <a16:creationId xmlns:a16="http://schemas.microsoft.com/office/drawing/2014/main" id="{6ADC2B73-D0A6-46A8-95CE-9A727796DE65}"/>
               </a:ext>
             </a:extLst>
           </p:cNvPr>
@@ -10646,7 +10646,7 @@
           <p:cNvPr id="17" name="">
             <a:extLst xmlns:a="http://schemas.openxmlformats.org/drawingml/2006/main">
               <a:ext uri="{FF2B5EF4-FFF2-40B4-BE49-F238E27FC236}">
-                <a16:creationId xmlns:a16="http://schemas.microsoft.com/office/drawing/2014/main" id="{381AF76E-4A35-414A-88D7-DA80CB3662DE}"/>
+                <a16:creationId xmlns:a16="http://schemas.microsoft.com/office/drawing/2014/main" id="{FF4510EC-5EAB-4E78-9F11-2844E2C22CF9}"/>
               </a:ext>
             </a:extLst>
           </p:cNvPr>
@@ -10692,7 +10692,7 @@
                 <a:latin typeface="Arial"/>
                 <a:ea typeface="Arial"/>
                 <a:cs typeface="Arial"/>
-                <a:hlinkClick xmlns:r="http://schemas.openxmlformats.org/officeDocument/2006/relationships" r:id="R0794d06e1fdb492a"/>
+                <a:hlinkClick xmlns:r="http://schemas.openxmlformats.org/officeDocument/2006/relationships" r:id="R553e8b94ca4642d5"/>
               </a:rPr>
               <a:t>Referencia del libro</a:t>
             </a:r>
@@ -10704,7 +10704,7 @@
           <p:cNvPr id="18" name="">
             <a:extLst xmlns:a="http://schemas.openxmlformats.org/drawingml/2006/main">
               <a:ext uri="{FF2B5EF4-FFF2-40B4-BE49-F238E27FC236}">
-                <a16:creationId xmlns:a16="http://schemas.microsoft.com/office/drawing/2014/main" id="{9F733062-C3A1-4705-852E-3C0880833C4F}"/>
+                <a16:creationId xmlns:a16="http://schemas.microsoft.com/office/drawing/2014/main" id="{659B254C-3860-47F5-A0DB-B0BED37B2298}"/>
               </a:ext>
             </a:extLst>
           </p:cNvPr>
@@ -10750,7 +10750,7 @@
                 <a:latin typeface="Arial"/>
                 <a:ea typeface="Arial"/>
                 <a:cs typeface="Arial"/>
-                <a:hlinkClick xmlns:r="http://schemas.openxmlformats.org/officeDocument/2006/relationships" r:id="R113ba18de5ff40e8"/>
+                <a:hlinkClick xmlns:r="http://schemas.openxmlformats.org/officeDocument/2006/relationships" r:id="R75dd84f805aa48d9"/>
               </a:rPr>
               <a:t>Referencia del libro</a:t>
             </a:r>
@@ -10762,7 +10762,7 @@
           <p:cNvPr id="19" name="">
             <a:extLst xmlns:a="http://schemas.openxmlformats.org/drawingml/2006/main">
               <a:ext uri="{FF2B5EF4-FFF2-40B4-BE49-F238E27FC236}">
-                <a16:creationId xmlns:a16="http://schemas.microsoft.com/office/drawing/2014/main" id="{662CEF36-C558-4D86-ABD1-F7D0118D94FB}"/>
+                <a16:creationId xmlns:a16="http://schemas.microsoft.com/office/drawing/2014/main" id="{4C12C460-B4DF-4D65-A278-696C1299B076}"/>
               </a:ext>
             </a:extLst>
           </p:cNvPr>
@@ -10819,7 +10819,7 @@
           <p:cNvPr id="20" name="">
             <a:extLst xmlns:a="http://schemas.openxmlformats.org/drawingml/2006/main">
               <a:ext uri="{FF2B5EF4-FFF2-40B4-BE49-F238E27FC236}">
-                <a16:creationId xmlns:a16="http://schemas.microsoft.com/office/drawing/2014/main" id="{E0275636-B004-45A3-A30B-6B791683F298}"/>
+                <a16:creationId xmlns:a16="http://schemas.microsoft.com/office/drawing/2014/main" id="{4B9CC590-AB7D-4027-9B61-2A452D2819E6}"/>
               </a:ext>
             </a:extLst>
           </p:cNvPr>
@@ -10865,7 +10865,7 @@
                 <a:latin typeface="Arial"/>
                 <a:ea typeface="Arial"/>
                 <a:cs typeface="Arial"/>
-                <a:hlinkClick xmlns:r="http://schemas.openxmlformats.org/officeDocument/2006/relationships" r:id="R13fb3ab5bbd84521"/>
+                <a:hlinkClick xmlns:r="http://schemas.openxmlformats.org/officeDocument/2006/relationships" r:id="R4e7a5086e8b24618"/>
               </a:rPr>
               <a:t>GitHub Docencia · Materiales de la asignatura</a:t>
             </a:r>
@@ -10875,7 +10875,7 @@
     </p:spTree>
     <p:extLst>
       <p:ext uri="{BB962C8B-B14F-4D97-AF65-F5344CB8AC3E}">
-        <p14:creationId xmlns:p14="http://schemas.microsoft.com/office/powerpoint/2010/main" val="475487792"/>
+        <p14:creationId xmlns:p14="http://schemas.microsoft.com/office/powerpoint/2010/main" val="1366151956"/>
       </p:ext>
     </p:extLst>
   </p:cSld>
@@ -10906,7 +10906,7 @@
           <p:cNvPr id="13" name="">
             <a:extLst xmlns:a="http://schemas.openxmlformats.org/drawingml/2006/main">
               <a:ext uri="{FF2B5EF4-FFF2-40B4-BE49-F238E27FC236}">
-                <a16:creationId xmlns:a16="http://schemas.microsoft.com/office/drawing/2014/main" id="{11D900CB-AC0F-4557-83E8-D986398EEEA7}"/>
+                <a16:creationId xmlns:a16="http://schemas.microsoft.com/office/drawing/2014/main" id="{E94FE9C6-60B1-4A7A-B257-AF5FA0ADF45B}"/>
               </a:ext>
             </a:extLst>
           </p:cNvPr>
@@ -10936,7 +10936,7 @@
           <p:cNvPr id="2" name="">
             <a:extLst xmlns:a="http://schemas.openxmlformats.org/drawingml/2006/main">
               <a:ext uri="{FF2B5EF4-FFF2-40B4-BE49-F238E27FC236}">
-                <a16:creationId xmlns:a16="http://schemas.microsoft.com/office/drawing/2014/main" id="{90CB3388-DD87-47F0-8404-2971CACBA119}"/>
+                <a16:creationId xmlns:a16="http://schemas.microsoft.com/office/drawing/2014/main" id="{D3CAF793-2868-4275-8446-A0652DA30AE6}"/>
               </a:ext>
             </a:extLst>
           </p:cNvPr>
@@ -10966,7 +10966,7 @@
           <p:cNvPr id="3" name="">
             <a:extLst xmlns:a="http://schemas.openxmlformats.org/drawingml/2006/main">
               <a:ext uri="{FF2B5EF4-FFF2-40B4-BE49-F238E27FC236}">
-                <a16:creationId xmlns:a16="http://schemas.microsoft.com/office/drawing/2014/main" id="{3C39D67D-4A35-4D54-AA63-82E598C643D2}"/>
+                <a16:creationId xmlns:a16="http://schemas.microsoft.com/office/drawing/2014/main" id="{8C37ABB1-BB81-4097-91B1-67B3C7B5A584}"/>
               </a:ext>
             </a:extLst>
           </p:cNvPr>
@@ -11023,7 +11023,7 @@
           <p:cNvPr id="4" name="">
             <a:extLst xmlns:a="http://schemas.openxmlformats.org/drawingml/2006/main">
               <a:ext uri="{FF2B5EF4-FFF2-40B4-BE49-F238E27FC236}">
-                <a16:creationId xmlns:a16="http://schemas.microsoft.com/office/drawing/2014/main" id="{DBFEF9BA-914A-4A52-BC95-958509F0F45E}"/>
+                <a16:creationId xmlns:a16="http://schemas.microsoft.com/office/drawing/2014/main" id="{A6D0C076-C8B3-4ABE-B331-98E72891DCC6}"/>
               </a:ext>
             </a:extLst>
           </p:cNvPr>
@@ -11080,7 +11080,7 @@
           <p:cNvPr id="5" name="">
             <a:extLst xmlns:a="http://schemas.openxmlformats.org/drawingml/2006/main">
               <a:ext uri="{FF2B5EF4-FFF2-40B4-BE49-F238E27FC236}">
-                <a16:creationId xmlns:a16="http://schemas.microsoft.com/office/drawing/2014/main" id="{1C1EA2C5-8E63-4718-9E74-DFA63FFAB154}"/>
+                <a16:creationId xmlns:a16="http://schemas.microsoft.com/office/drawing/2014/main" id="{BFAE1BF9-8E05-4EC5-8738-E9FCDB1EB147}"/>
               </a:ext>
             </a:extLst>
           </p:cNvPr>
@@ -11137,7 +11137,7 @@
           <p:cNvPr id="6" name="">
             <a:extLst xmlns:a="http://schemas.openxmlformats.org/drawingml/2006/main">
               <a:ext uri="{FF2B5EF4-FFF2-40B4-BE49-F238E27FC236}">
-                <a16:creationId xmlns:a16="http://schemas.microsoft.com/office/drawing/2014/main" id="{B712BB91-0960-4214-9DB8-69E3F9AA4EC2}"/>
+                <a16:creationId xmlns:a16="http://schemas.microsoft.com/office/drawing/2014/main" id="{20E74506-851A-46A0-97BE-DE8C94FC54E7}"/>
               </a:ext>
             </a:extLst>
           </p:cNvPr>
@@ -11194,7 +11194,7 @@
           <p:cNvPr id="7" name="">
             <a:extLst xmlns:a="http://schemas.openxmlformats.org/drawingml/2006/main">
               <a:ext uri="{FF2B5EF4-FFF2-40B4-BE49-F238E27FC236}">
-                <a16:creationId xmlns:a16="http://schemas.microsoft.com/office/drawing/2014/main" id="{3F8C1F15-292A-42E4-BE15-5701AC8627C0}"/>
+                <a16:creationId xmlns:a16="http://schemas.microsoft.com/office/drawing/2014/main" id="{68FD193B-FAAB-4D7D-9D15-834B8B263DD3}"/>
               </a:ext>
             </a:extLst>
           </p:cNvPr>
@@ -11251,7 +11251,7 @@
           <p:cNvPr id="8" name="">
             <a:extLst xmlns:a="http://schemas.openxmlformats.org/drawingml/2006/main">
               <a:ext uri="{FF2B5EF4-FFF2-40B4-BE49-F238E27FC236}">
-                <a16:creationId xmlns:a16="http://schemas.microsoft.com/office/drawing/2014/main" id="{C499C32B-B248-49CF-8824-5059121D9CB1}"/>
+                <a16:creationId xmlns:a16="http://schemas.microsoft.com/office/drawing/2014/main" id="{B6586B16-2C17-4C33-BBA1-F847BAF23561}"/>
               </a:ext>
             </a:extLst>
           </p:cNvPr>
@@ -11308,7 +11308,7 @@
           <p:cNvPr id="9" name="">
             <a:extLst xmlns:a="http://schemas.openxmlformats.org/drawingml/2006/main">
               <a:ext uri="{FF2B5EF4-FFF2-40B4-BE49-F238E27FC236}">
-                <a16:creationId xmlns:a16="http://schemas.microsoft.com/office/drawing/2014/main" id="{EEC6C54B-8D1B-42DF-B826-BE14B6A703B1}"/>
+                <a16:creationId xmlns:a16="http://schemas.microsoft.com/office/drawing/2014/main" id="{D57D53E3-9C09-42CC-9702-ED4FBCBEE23B}"/>
               </a:ext>
             </a:extLst>
           </p:cNvPr>
@@ -11365,7 +11365,7 @@
           <p:cNvPr id="10" name="">
             <a:extLst xmlns:a="http://schemas.openxmlformats.org/drawingml/2006/main">
               <a:ext uri="{FF2B5EF4-FFF2-40B4-BE49-F238E27FC236}">
-                <a16:creationId xmlns:a16="http://schemas.microsoft.com/office/drawing/2014/main" id="{60F6B7EA-9FF3-4334-B2C6-656C1162F738}"/>
+                <a16:creationId xmlns:a16="http://schemas.microsoft.com/office/drawing/2014/main" id="{5FE2B70C-7208-4E6F-A5AA-9BFF642DDF5D}"/>
               </a:ext>
             </a:extLst>
           </p:cNvPr>
@@ -11422,7 +11422,7 @@
           <p:cNvPr id="11" name="">
             <a:extLst xmlns:a="http://schemas.openxmlformats.org/drawingml/2006/main">
               <a:ext uri="{FF2B5EF4-FFF2-40B4-BE49-F238E27FC236}">
-                <a16:creationId xmlns:a16="http://schemas.microsoft.com/office/drawing/2014/main" id="{02F0F09C-C903-4ED0-BCE6-D07EB62403DE}"/>
+                <a16:creationId xmlns:a16="http://schemas.microsoft.com/office/drawing/2014/main" id="{588A1BBC-A4F7-428A-8431-580BADDECD09}"/>
               </a:ext>
             </a:extLst>
           </p:cNvPr>
@@ -11479,7 +11479,7 @@
           <p:cNvPr id="12" name="">
             <a:extLst xmlns:a="http://schemas.openxmlformats.org/drawingml/2006/main">
               <a:ext uri="{FF2B5EF4-FFF2-40B4-BE49-F238E27FC236}">
-                <a16:creationId xmlns:a16="http://schemas.microsoft.com/office/drawing/2014/main" id="{D90952F6-F67C-4FF0-A2E4-50C24D576C4C}"/>
+                <a16:creationId xmlns:a16="http://schemas.microsoft.com/office/drawing/2014/main" id="{69669DAF-B008-4876-88A5-CF941F5C5E5C}"/>
               </a:ext>
             </a:extLst>
           </p:cNvPr>
@@ -11536,7 +11536,7 @@
                 <a:latin typeface="Arial"/>
                 <a:ea typeface="Arial"/>
                 <a:cs typeface="Arial"/>
-                <a:hlinkClick xmlns:r="http://schemas.openxmlformats.org/officeDocument/2006/relationships" r:id="R2123df45e0af4554"/>
+                <a:hlinkClick xmlns:r="http://schemas.openxmlformats.org/officeDocument/2006/relationships" r:id="Rd3422e4c17654f0a"/>
               </a:rPr>
               <a:t>erik.figueiral.alonso@uvigo.gal</a:t>
             </a:r>
@@ -11546,7 +11546,7 @@
     </p:spTree>
     <p:extLst>
       <p:ext uri="{BB962C8B-B14F-4D97-AF65-F5344CB8AC3E}">
-        <p14:creationId xmlns:p14="http://schemas.microsoft.com/office/powerpoint/2010/main" val="1732712420"/>
+        <p14:creationId xmlns:p14="http://schemas.microsoft.com/office/powerpoint/2010/main" val="949630648"/>
       </p:ext>
     </p:extLst>
   </p:cSld>
@@ -11577,7 +11577,7 @@
           <p:cNvPr id="13" name="">
             <a:extLst xmlns:a="http://schemas.openxmlformats.org/drawingml/2006/main">
               <a:ext uri="{FF2B5EF4-FFF2-40B4-BE49-F238E27FC236}">
-                <a16:creationId xmlns:a16="http://schemas.microsoft.com/office/drawing/2014/main" id="{C41C547A-9A9F-4726-9A11-2A5E3C45C154}"/>
+                <a16:creationId xmlns:a16="http://schemas.microsoft.com/office/drawing/2014/main" id="{A1D5274C-F74A-4F9A-8ECD-D7C90E9B2E4A}"/>
               </a:ext>
             </a:extLst>
           </p:cNvPr>
@@ -11607,7 +11607,7 @@
           <p:cNvPr id="2" name="">
             <a:extLst xmlns:a="http://schemas.openxmlformats.org/drawingml/2006/main">
               <a:ext uri="{FF2B5EF4-FFF2-40B4-BE49-F238E27FC236}">
-                <a16:creationId xmlns:a16="http://schemas.microsoft.com/office/drawing/2014/main" id="{3CFAF45D-CC0D-406A-94F9-6F29567063A0}"/>
+                <a16:creationId xmlns:a16="http://schemas.microsoft.com/office/drawing/2014/main" id="{E5C5DC6B-C0C9-4F51-8044-0CC405835A65}"/>
               </a:ext>
             </a:extLst>
           </p:cNvPr>
@@ -11637,7 +11637,7 @@
           <p:cNvPr id="3" name="">
             <a:extLst xmlns:a="http://schemas.openxmlformats.org/drawingml/2006/main">
               <a:ext uri="{FF2B5EF4-FFF2-40B4-BE49-F238E27FC236}">
-                <a16:creationId xmlns:a16="http://schemas.microsoft.com/office/drawing/2014/main" id="{21D56EB8-46CC-48CE-BB50-76A63BEF87E9}"/>
+                <a16:creationId xmlns:a16="http://schemas.microsoft.com/office/drawing/2014/main" id="{A1D017B5-907D-47B0-BE84-FD1E33DE27C4}"/>
               </a:ext>
             </a:extLst>
           </p:cNvPr>
@@ -11694,7 +11694,7 @@
           <p:cNvPr id="4" name="">
             <a:extLst xmlns:a="http://schemas.openxmlformats.org/drawingml/2006/main">
               <a:ext uri="{FF2B5EF4-FFF2-40B4-BE49-F238E27FC236}">
-                <a16:creationId xmlns:a16="http://schemas.microsoft.com/office/drawing/2014/main" id="{3B218605-416A-4F71-A4C9-792142D02C3C}"/>
+                <a16:creationId xmlns:a16="http://schemas.microsoft.com/office/drawing/2014/main" id="{CC26FFD6-BE8B-4899-A65C-010FCCA474B9}"/>
               </a:ext>
             </a:extLst>
           </p:cNvPr>
@@ -11751,7 +11751,7 @@
           <p:cNvPr id="5" name="">
             <a:extLst xmlns:a="http://schemas.openxmlformats.org/drawingml/2006/main">
               <a:ext uri="{FF2B5EF4-FFF2-40B4-BE49-F238E27FC236}">
-                <a16:creationId xmlns:a16="http://schemas.microsoft.com/office/drawing/2014/main" id="{5CDCA3F8-3EB8-4ECA-A391-11F2189AB03C}"/>
+                <a16:creationId xmlns:a16="http://schemas.microsoft.com/office/drawing/2014/main" id="{D7B648B9-E9E7-468E-A902-086F7EE8F2F4}"/>
               </a:ext>
             </a:extLst>
           </p:cNvPr>
@@ -11808,7 +11808,7 @@
           <p:cNvPr id="6" name="">
             <a:extLst xmlns:a="http://schemas.openxmlformats.org/drawingml/2006/main">
               <a:ext uri="{FF2B5EF4-FFF2-40B4-BE49-F238E27FC236}">
-                <a16:creationId xmlns:a16="http://schemas.microsoft.com/office/drawing/2014/main" id="{335F14E9-28AB-4978-B539-EC8EBC0F0958}"/>
+                <a16:creationId xmlns:a16="http://schemas.microsoft.com/office/drawing/2014/main" id="{9DEA0E64-46B6-4EAD-AE9D-8957A0061871}"/>
               </a:ext>
             </a:extLst>
           </p:cNvPr>
@@ -11865,7 +11865,7 @@
           <p:cNvPr id="7" name="">
             <a:extLst xmlns:a="http://schemas.openxmlformats.org/drawingml/2006/main">
               <a:ext uri="{FF2B5EF4-FFF2-40B4-BE49-F238E27FC236}">
-                <a16:creationId xmlns:a16="http://schemas.microsoft.com/office/drawing/2014/main" id="{2DB09198-2459-438B-987B-634689DCC93D}"/>
+                <a16:creationId xmlns:a16="http://schemas.microsoft.com/office/drawing/2014/main" id="{A5365D76-BD3D-4073-A6DE-10D9DFDE7A48}"/>
               </a:ext>
             </a:extLst>
           </p:cNvPr>
@@ -11922,7 +11922,7 @@
           <p:cNvPr id="8" name="">
             <a:extLst xmlns:a="http://schemas.openxmlformats.org/drawingml/2006/main">
               <a:ext uri="{FF2B5EF4-FFF2-40B4-BE49-F238E27FC236}">
-                <a16:creationId xmlns:a16="http://schemas.microsoft.com/office/drawing/2014/main" id="{423FC986-4DE1-4768-B4B7-1B9A487DA0F9}"/>
+                <a16:creationId xmlns:a16="http://schemas.microsoft.com/office/drawing/2014/main" id="{02023A23-7A74-4950-BC3F-E2DFA8749F9C}"/>
               </a:ext>
             </a:extLst>
           </p:cNvPr>
@@ -11979,7 +11979,7 @@
           <p:cNvPr id="9" name="">
             <a:extLst xmlns:a="http://schemas.openxmlformats.org/drawingml/2006/main">
               <a:ext uri="{FF2B5EF4-FFF2-40B4-BE49-F238E27FC236}">
-                <a16:creationId xmlns:a16="http://schemas.microsoft.com/office/drawing/2014/main" id="{82D4272F-9E8E-4587-B2B7-14755669086B}"/>
+                <a16:creationId xmlns:a16="http://schemas.microsoft.com/office/drawing/2014/main" id="{09157FEC-2738-4C7D-A044-970733F9432F}"/>
               </a:ext>
             </a:extLst>
           </p:cNvPr>
@@ -13266,7 +13266,7 @@
           <p:cNvPr id="12" name="">
             <a:extLst xmlns:a="http://schemas.openxmlformats.org/drawingml/2006/main">
               <a:ext uri="{FF2B5EF4-FFF2-40B4-BE49-F238E27FC236}">
-                <a16:creationId xmlns:a16="http://schemas.microsoft.com/office/drawing/2014/main" id="{149A4B41-DDDF-4A69-B830-A77D56D4062B}"/>
+                <a16:creationId xmlns:a16="http://schemas.microsoft.com/office/drawing/2014/main" id="{06C7B1A8-24EA-4C21-A11D-C05A652D8A9B}"/>
               </a:ext>
             </a:extLst>
           </p:cNvPr>
@@ -13321,7 +13321,7 @@
     </p:spTree>
     <p:extLst>
       <p:ext uri="{BB962C8B-B14F-4D97-AF65-F5344CB8AC3E}">
-        <p14:creationId xmlns:p14="http://schemas.microsoft.com/office/powerpoint/2010/main" val="859802334"/>
+        <p14:creationId xmlns:p14="http://schemas.microsoft.com/office/powerpoint/2010/main" val="315270297"/>
       </p:ext>
     </p:extLst>
   </p:cSld>
@@ -13352,7 +13352,7 @@
           <p:cNvPr id="11" name="">
             <a:extLst xmlns:a="http://schemas.openxmlformats.org/drawingml/2006/main">
               <a:ext uri="{FF2B5EF4-FFF2-40B4-BE49-F238E27FC236}">
-                <a16:creationId xmlns:a16="http://schemas.microsoft.com/office/drawing/2014/main" id="{27679844-D12C-491A-99E8-D923D0F788EF}"/>
+                <a16:creationId xmlns:a16="http://schemas.microsoft.com/office/drawing/2014/main" id="{A5EAC117-AC3A-459E-9C84-1C525EB3338C}"/>
               </a:ext>
             </a:extLst>
           </p:cNvPr>
@@ -13382,7 +13382,7 @@
           <p:cNvPr id="2" name="">
             <a:extLst xmlns:a="http://schemas.openxmlformats.org/drawingml/2006/main">
               <a:ext uri="{FF2B5EF4-FFF2-40B4-BE49-F238E27FC236}">
-                <a16:creationId xmlns:a16="http://schemas.microsoft.com/office/drawing/2014/main" id="{57745A5D-B093-4B43-BCC2-797D7BEC07AA}"/>
+                <a16:creationId xmlns:a16="http://schemas.microsoft.com/office/drawing/2014/main" id="{8058DB90-DB9F-40A0-832B-E4C3C71ABA64}"/>
               </a:ext>
             </a:extLst>
           </p:cNvPr>
@@ -13412,7 +13412,7 @@
           <p:cNvPr id="3" name="">
             <a:extLst xmlns:a="http://schemas.openxmlformats.org/drawingml/2006/main">
               <a:ext uri="{FF2B5EF4-FFF2-40B4-BE49-F238E27FC236}">
-                <a16:creationId xmlns:a16="http://schemas.microsoft.com/office/drawing/2014/main" id="{8DAF8EA7-24C0-4A08-B433-24DA615B9F03}"/>
+                <a16:creationId xmlns:a16="http://schemas.microsoft.com/office/drawing/2014/main" id="{6461C6DA-70FD-463D-88C4-6CC0A1A6C883}"/>
               </a:ext>
             </a:extLst>
           </p:cNvPr>
@@ -13469,7 +13469,7 @@
           <p:cNvPr id="4" name="">
             <a:extLst xmlns:a="http://schemas.openxmlformats.org/drawingml/2006/main">
               <a:ext uri="{FF2B5EF4-FFF2-40B4-BE49-F238E27FC236}">
-                <a16:creationId xmlns:a16="http://schemas.microsoft.com/office/drawing/2014/main" id="{FEACF177-37AA-4E63-A34E-1BB96613490D}"/>
+                <a16:creationId xmlns:a16="http://schemas.microsoft.com/office/drawing/2014/main" id="{8618209C-C59B-4D64-ACB0-B16E465C61C4}"/>
               </a:ext>
             </a:extLst>
           </p:cNvPr>
@@ -13526,7 +13526,7 @@
           <p:cNvPr id="5" name="">
             <a:extLst xmlns:a="http://schemas.openxmlformats.org/drawingml/2006/main">
               <a:ext uri="{FF2B5EF4-FFF2-40B4-BE49-F238E27FC236}">
-                <a16:creationId xmlns:a16="http://schemas.microsoft.com/office/drawing/2014/main" id="{F4739836-68FB-4A4A-BBA2-1F3ABA59BA9D}"/>
+                <a16:creationId xmlns:a16="http://schemas.microsoft.com/office/drawing/2014/main" id="{E39BDF38-7FFB-4B56-AAD5-628D24CBD472}"/>
               </a:ext>
             </a:extLst>
           </p:cNvPr>
@@ -13583,7 +13583,7 @@
           <p:cNvPr id="6" name="">
             <a:extLst xmlns:a="http://schemas.openxmlformats.org/drawingml/2006/main">
               <a:ext uri="{FF2B5EF4-FFF2-40B4-BE49-F238E27FC236}">
-                <a16:creationId xmlns:a16="http://schemas.microsoft.com/office/drawing/2014/main" id="{09E81A68-913D-404E-B78C-B176CAE1970A}"/>
+                <a16:creationId xmlns:a16="http://schemas.microsoft.com/office/drawing/2014/main" id="{0D782F65-769C-4FAF-A095-B82395449F9E}"/>
               </a:ext>
             </a:extLst>
           </p:cNvPr>
@@ -13959,7 +13959,7 @@
           <p:cNvPr id="8" name="">
             <a:extLst xmlns:a="http://schemas.openxmlformats.org/drawingml/2006/main">
               <a:ext uri="{FF2B5EF4-FFF2-40B4-BE49-F238E27FC236}">
-                <a16:creationId xmlns:a16="http://schemas.microsoft.com/office/drawing/2014/main" id="{E9DC2DA9-4308-4188-A399-5037ECD49560}"/>
+                <a16:creationId xmlns:a16="http://schemas.microsoft.com/office/drawing/2014/main" id="{A11991F1-85F1-4A32-B6A8-983DA5DD4FDD}"/>
               </a:ext>
             </a:extLst>
           </p:cNvPr>
@@ -14016,7 +14016,7 @@
           <p:cNvPr id="9" name="">
             <a:extLst xmlns:a="http://schemas.openxmlformats.org/drawingml/2006/main">
               <a:ext uri="{FF2B5EF4-FFF2-40B4-BE49-F238E27FC236}">
-                <a16:creationId xmlns:a16="http://schemas.microsoft.com/office/drawing/2014/main" id="{70D57109-FE02-4ACC-AB8F-6689981F6D0C}"/>
+                <a16:creationId xmlns:a16="http://schemas.microsoft.com/office/drawing/2014/main" id="{266ECD64-A4D1-44F6-88CA-4023C9DCBE96}"/>
               </a:ext>
             </a:extLst>
           </p:cNvPr>
@@ -14073,7 +14073,7 @@
           <p:cNvPr id="10" name="">
             <a:extLst xmlns:a="http://schemas.openxmlformats.org/drawingml/2006/main">
               <a:ext uri="{FF2B5EF4-FFF2-40B4-BE49-F238E27FC236}">
-                <a16:creationId xmlns:a16="http://schemas.microsoft.com/office/drawing/2014/main" id="{709228C5-64D2-43B0-93C9-A560B7137E3B}"/>
+                <a16:creationId xmlns:a16="http://schemas.microsoft.com/office/drawing/2014/main" id="{9D3132D2-61E8-4A4C-A912-C32C09CB1E16}"/>
               </a:ext>
             </a:extLst>
           </p:cNvPr>
@@ -14119,7 +14119,7 @@
                 <a:latin typeface="Arial"/>
                 <a:ea typeface="Arial"/>
                 <a:cs typeface="Arial"/>
-                <a:hlinkClick xmlns:r="http://schemas.openxmlformats.org/officeDocument/2006/relationships" r:id="R1fb2ecf3b64a4827"/>
+                <a:hlinkClick xmlns:r="http://schemas.openxmlformats.org/officeDocument/2006/relationships" r:id="R6a7d6cac64294fe4"/>
               </a:rPr>
               <a:t>Fuente: guía docente 2025–2026 · Planificación de prácticas</a:t>
             </a:r>
@@ -14129,7 +14129,7 @@
     </p:spTree>
     <p:extLst>
       <p:ext uri="{BB962C8B-B14F-4D97-AF65-F5344CB8AC3E}">
-        <p14:creationId xmlns:p14="http://schemas.microsoft.com/office/powerpoint/2010/main" val="43579053"/>
+        <p14:creationId xmlns:p14="http://schemas.microsoft.com/office/powerpoint/2010/main" val="1082007251"/>
       </p:ext>
     </p:extLst>
   </p:cSld>
@@ -14160,7 +14160,7 @@
           <p:cNvPr id="13" name="">
             <a:extLst xmlns:a="http://schemas.openxmlformats.org/drawingml/2006/main">
               <a:ext uri="{FF2B5EF4-FFF2-40B4-BE49-F238E27FC236}">
-                <a16:creationId xmlns:a16="http://schemas.microsoft.com/office/drawing/2014/main" id="{BB420938-9C2A-4C85-B3FD-5235EF56F2E5}"/>
+                <a16:creationId xmlns:a16="http://schemas.microsoft.com/office/drawing/2014/main" id="{188E2B58-DA4C-4D02-AA6C-8644F32E5907}"/>
               </a:ext>
             </a:extLst>
           </p:cNvPr>
@@ -14190,7 +14190,7 @@
           <p:cNvPr id="2" name="">
             <a:extLst xmlns:a="http://schemas.openxmlformats.org/drawingml/2006/main">
               <a:ext uri="{FF2B5EF4-FFF2-40B4-BE49-F238E27FC236}">
-                <a16:creationId xmlns:a16="http://schemas.microsoft.com/office/drawing/2014/main" id="{A436E2FD-FB78-4FB5-B49A-91F1EAF9FB35}"/>
+                <a16:creationId xmlns:a16="http://schemas.microsoft.com/office/drawing/2014/main" id="{DB30D8AD-8647-47BB-BD4C-DADB9B7CF6C7}"/>
               </a:ext>
             </a:extLst>
           </p:cNvPr>
@@ -14220,7 +14220,7 @@
           <p:cNvPr id="3" name="">
             <a:extLst xmlns:a="http://schemas.openxmlformats.org/drawingml/2006/main">
               <a:ext uri="{FF2B5EF4-FFF2-40B4-BE49-F238E27FC236}">
-                <a16:creationId xmlns:a16="http://schemas.microsoft.com/office/drawing/2014/main" id="{03B0B708-62B4-4FEB-9372-72BB893F0288}"/>
+                <a16:creationId xmlns:a16="http://schemas.microsoft.com/office/drawing/2014/main" id="{D75860DF-23E7-4BC7-B79C-0B0E553B3DBB}"/>
               </a:ext>
             </a:extLst>
           </p:cNvPr>
@@ -14277,7 +14277,7 @@
           <p:cNvPr id="4" name="">
             <a:extLst xmlns:a="http://schemas.openxmlformats.org/drawingml/2006/main">
               <a:ext uri="{FF2B5EF4-FFF2-40B4-BE49-F238E27FC236}">
-                <a16:creationId xmlns:a16="http://schemas.microsoft.com/office/drawing/2014/main" id="{6E433DBA-178B-4F1A-8C3C-27945A57147F}"/>
+                <a16:creationId xmlns:a16="http://schemas.microsoft.com/office/drawing/2014/main" id="{2EEE4666-1E14-4C66-B21C-AE2FA1C2210C}"/>
               </a:ext>
             </a:extLst>
           </p:cNvPr>
@@ -14334,7 +14334,7 @@
           <p:cNvPr id="5" name="">
             <a:extLst xmlns:a="http://schemas.openxmlformats.org/drawingml/2006/main">
               <a:ext uri="{FF2B5EF4-FFF2-40B4-BE49-F238E27FC236}">
-                <a16:creationId xmlns:a16="http://schemas.microsoft.com/office/drawing/2014/main" id="{0B71BD2C-A0F0-49A8-A8D2-1B6AB3B4D8F0}"/>
+                <a16:creationId xmlns:a16="http://schemas.microsoft.com/office/drawing/2014/main" id="{A33D3727-3FF2-4438-AEF2-FCEFE4A07C70}"/>
               </a:ext>
             </a:extLst>
           </p:cNvPr>
@@ -14391,7 +14391,7 @@
           <p:cNvPr id="6" name="">
             <a:extLst xmlns:a="http://schemas.openxmlformats.org/drawingml/2006/main">
               <a:ext uri="{FF2B5EF4-FFF2-40B4-BE49-F238E27FC236}">
-                <a16:creationId xmlns:a16="http://schemas.microsoft.com/office/drawing/2014/main" id="{ACF2D42B-DB19-455D-89B6-E27D0AE8534E}"/>
+                <a16:creationId xmlns:a16="http://schemas.microsoft.com/office/drawing/2014/main" id="{98506B61-7B74-4FEB-9EE3-73EDC00A22ED}"/>
               </a:ext>
             </a:extLst>
           </p:cNvPr>
@@ -14452,7 +14452,7 @@
           <p:nvPr/>
         </p:nvPicPr>
         <p:blipFill>
-          <a:blip xmlns:r="http://schemas.openxmlformats.org/officeDocument/2006/relationships" xmlns:a="http://schemas.openxmlformats.org/drawingml/2006/main" r:embed="Rff02bd5501dd430e"/>
+          <a:blip xmlns:r="http://schemas.openxmlformats.org/officeDocument/2006/relationships" xmlns:a="http://schemas.openxmlformats.org/drawingml/2006/main" r:embed="R5cfc1df7b8ac48bd"/>
           <a:stretch xmlns:a="http://schemas.openxmlformats.org/drawingml/2006/main"/>
         </p:blipFill>
         <p:spPr>
@@ -14470,7 +14470,7 @@
           <p:cNvPr id="8" name="">
             <a:extLst xmlns:a="http://schemas.openxmlformats.org/drawingml/2006/main">
               <a:ext uri="{FF2B5EF4-FFF2-40B4-BE49-F238E27FC236}">
-                <a16:creationId xmlns:a16="http://schemas.microsoft.com/office/drawing/2014/main" id="{27B8BA47-232F-470D-8084-DA644A043193}"/>
+                <a16:creationId xmlns:a16="http://schemas.microsoft.com/office/drawing/2014/main" id="{3CD2B702-6A40-4407-9A5B-C9E10DD946E0}"/>
               </a:ext>
             </a:extLst>
           </p:cNvPr>
@@ -14527,7 +14527,7 @@
           <p:cNvPr id="9" name="">
             <a:extLst xmlns:a="http://schemas.openxmlformats.org/drawingml/2006/main">
               <a:ext uri="{FF2B5EF4-FFF2-40B4-BE49-F238E27FC236}">
-                <a16:creationId xmlns:a16="http://schemas.microsoft.com/office/drawing/2014/main" id="{DB7B1F1D-C50C-4534-B9BB-88DBC94C0E2A}"/>
+                <a16:creationId xmlns:a16="http://schemas.microsoft.com/office/drawing/2014/main" id="{D243AE53-C2D0-4FDC-B35C-C8D02EE11E74}"/>
               </a:ext>
             </a:extLst>
           </p:cNvPr>
@@ -14584,7 +14584,7 @@
           <p:cNvPr id="10" name="">
             <a:extLst xmlns:a="http://schemas.openxmlformats.org/drawingml/2006/main">
               <a:ext uri="{FF2B5EF4-FFF2-40B4-BE49-F238E27FC236}">
-                <a16:creationId xmlns:a16="http://schemas.microsoft.com/office/drawing/2014/main" id="{27BD086D-8539-4E51-A524-124E46EA32BE}"/>
+                <a16:creationId xmlns:a16="http://schemas.microsoft.com/office/drawing/2014/main" id="{F1075787-BCA7-43B3-A98E-D04C406F94E3}"/>
               </a:ext>
             </a:extLst>
           </p:cNvPr>
@@ -14641,7 +14641,7 @@
           <p:cNvPr id="11" name="">
             <a:extLst xmlns:a="http://schemas.openxmlformats.org/drawingml/2006/main">
               <a:ext uri="{FF2B5EF4-FFF2-40B4-BE49-F238E27FC236}">
-                <a16:creationId xmlns:a16="http://schemas.microsoft.com/office/drawing/2014/main" id="{305C1631-6943-4AB7-B236-6D1407437A3E}"/>
+                <a16:creationId xmlns:a16="http://schemas.microsoft.com/office/drawing/2014/main" id="{AF4A42CC-4533-4778-93ED-B19648D36654}"/>
               </a:ext>
             </a:extLst>
           </p:cNvPr>
@@ -14698,7 +14698,7 @@
           <p:cNvPr id="12" name="">
             <a:extLst xmlns:a="http://schemas.openxmlformats.org/drawingml/2006/main">
               <a:ext uri="{FF2B5EF4-FFF2-40B4-BE49-F238E27FC236}">
-                <a16:creationId xmlns:a16="http://schemas.microsoft.com/office/drawing/2014/main" id="{B1449DC7-FC09-4108-96CA-928DDB8C4B16}"/>
+                <a16:creationId xmlns:a16="http://schemas.microsoft.com/office/drawing/2014/main" id="{7A57DBBB-56AE-45FA-B8A5-723BBDC47C62}"/>
               </a:ext>
             </a:extLst>
           </p:cNvPr>
@@ -14744,7 +14744,7 @@
                 <a:latin typeface="Arial"/>
                 <a:ea typeface="Arial"/>
                 <a:cs typeface="Arial"/>
-                <a:hlinkClick xmlns:r="http://schemas.openxmlformats.org/officeDocument/2006/relationships" r:id="R947b26a9639a4bce"/>
+                <a:hlinkClick xmlns:r="http://schemas.openxmlformats.org/officeDocument/2006/relationships" r:id="Rf30fe2da825546ca"/>
               </a:rPr>
               <a:t>ESEI · Estructura oficial de la documentación del TFG (PDF)</a:t>
             </a:r>
@@ -14754,7 +14754,7 @@
     </p:spTree>
     <p:extLst>
       <p:ext uri="{BB962C8B-B14F-4D97-AF65-F5344CB8AC3E}">
-        <p14:creationId xmlns:p14="http://schemas.microsoft.com/office/powerpoint/2010/main" val="1975356039"/>
+        <p14:creationId xmlns:p14="http://schemas.microsoft.com/office/powerpoint/2010/main" val="322280322"/>
       </p:ext>
     </p:extLst>
   </p:cSld>
@@ -14785,7 +14785,7 @@
           <p:cNvPr id="9" name="">
             <a:extLst xmlns:a="http://schemas.openxmlformats.org/drawingml/2006/main">
               <a:ext uri="{FF2B5EF4-FFF2-40B4-BE49-F238E27FC236}">
-                <a16:creationId xmlns:a16="http://schemas.microsoft.com/office/drawing/2014/main" id="{6FA5F4E0-56E7-4D54-B3ED-5EFF94D78265}"/>
+                <a16:creationId xmlns:a16="http://schemas.microsoft.com/office/drawing/2014/main" id="{FB5FEDA1-2F0C-43FF-85FD-9376148C7E64}"/>
               </a:ext>
             </a:extLst>
           </p:cNvPr>
@@ -14815,7 +14815,7 @@
           <p:cNvPr id="2" name="">
             <a:extLst xmlns:a="http://schemas.openxmlformats.org/drawingml/2006/main">
               <a:ext uri="{FF2B5EF4-FFF2-40B4-BE49-F238E27FC236}">
-                <a16:creationId xmlns:a16="http://schemas.microsoft.com/office/drawing/2014/main" id="{FB40FCAE-00F6-4A83-848B-5AF5D60F8F13}"/>
+                <a16:creationId xmlns:a16="http://schemas.microsoft.com/office/drawing/2014/main" id="{026C7783-1210-4753-9BF3-1AF91B2A6C9C}"/>
               </a:ext>
             </a:extLst>
           </p:cNvPr>
@@ -14845,7 +14845,7 @@
           <p:cNvPr id="3" name="">
             <a:extLst xmlns:a="http://schemas.openxmlformats.org/drawingml/2006/main">
               <a:ext uri="{FF2B5EF4-FFF2-40B4-BE49-F238E27FC236}">
-                <a16:creationId xmlns:a16="http://schemas.microsoft.com/office/drawing/2014/main" id="{E4B391CB-251D-4140-A443-BFD37E67FE57}"/>
+                <a16:creationId xmlns:a16="http://schemas.microsoft.com/office/drawing/2014/main" id="{AE368EF0-D828-4C78-9E47-896CC2F6B0C5}"/>
               </a:ext>
             </a:extLst>
           </p:cNvPr>
@@ -14902,7 +14902,7 @@
           <p:cNvPr id="4" name="">
             <a:extLst xmlns:a="http://schemas.openxmlformats.org/drawingml/2006/main">
               <a:ext uri="{FF2B5EF4-FFF2-40B4-BE49-F238E27FC236}">
-                <a16:creationId xmlns:a16="http://schemas.microsoft.com/office/drawing/2014/main" id="{45686B32-3A66-4765-B9E1-5CD300217F11}"/>
+                <a16:creationId xmlns:a16="http://schemas.microsoft.com/office/drawing/2014/main" id="{9272EFE6-FC96-4839-B28C-A5DD68C1FDF9}"/>
               </a:ext>
             </a:extLst>
           </p:cNvPr>
@@ -14959,7 +14959,7 @@
           <p:cNvPr id="5" name="">
             <a:extLst xmlns:a="http://schemas.openxmlformats.org/drawingml/2006/main">
               <a:ext uri="{FF2B5EF4-FFF2-40B4-BE49-F238E27FC236}">
-                <a16:creationId xmlns:a16="http://schemas.microsoft.com/office/drawing/2014/main" id="{0BECF95C-79AC-4F69-B773-534F4DE36F1A}"/>
+                <a16:creationId xmlns:a16="http://schemas.microsoft.com/office/drawing/2014/main" id="{178C28FD-E7F4-4226-A4A3-42F25125232A}"/>
               </a:ext>
             </a:extLst>
           </p:cNvPr>
@@ -15016,7 +15016,7 @@
           <p:cNvPr id="6" name="">
             <a:extLst xmlns:a="http://schemas.openxmlformats.org/drawingml/2006/main">
               <a:ext uri="{FF2B5EF4-FFF2-40B4-BE49-F238E27FC236}">
-                <a16:creationId xmlns:a16="http://schemas.microsoft.com/office/drawing/2014/main" id="{CDEFC204-AF60-4842-81E6-37142E060D86}"/>
+                <a16:creationId xmlns:a16="http://schemas.microsoft.com/office/drawing/2014/main" id="{E84EE608-690C-432F-89F3-A92537EC22AA}"/>
               </a:ext>
             </a:extLst>
           </p:cNvPr>
@@ -15077,7 +15077,7 @@
           <p:nvPr/>
         </p:nvPicPr>
         <p:blipFill>
-          <a:blip xmlns:r="http://schemas.openxmlformats.org/officeDocument/2006/relationships" xmlns:a="http://schemas.openxmlformats.org/drawingml/2006/main" r:embed="Ref4f864d6c7649b4"/>
+          <a:blip xmlns:r="http://schemas.openxmlformats.org/officeDocument/2006/relationships" xmlns:a="http://schemas.openxmlformats.org/drawingml/2006/main" r:embed="Re08e2ae7e97b403d"/>
           <a:stretch xmlns:a="http://schemas.openxmlformats.org/drawingml/2006/main"/>
         </p:blipFill>
         <p:spPr>
@@ -15095,7 +15095,7 @@
           <p:cNvPr id="8" name="">
             <a:extLst xmlns:a="http://schemas.openxmlformats.org/drawingml/2006/main">
               <a:ext uri="{FF2B5EF4-FFF2-40B4-BE49-F238E27FC236}">
-                <a16:creationId xmlns:a16="http://schemas.microsoft.com/office/drawing/2014/main" id="{D6BA2762-0F41-4AB4-BFCC-40439C93F143}"/>
+                <a16:creationId xmlns:a16="http://schemas.microsoft.com/office/drawing/2014/main" id="{85EEA41F-865F-4C3A-9761-5F11D19A31B1}"/>
               </a:ext>
             </a:extLst>
           </p:cNvPr>
@@ -15141,7 +15141,7 @@
                 <a:latin typeface="Arial"/>
                 <a:ea typeface="Arial"/>
                 <a:cs typeface="Arial"/>
-                <a:hlinkClick xmlns:r="http://schemas.openxmlformats.org/officeDocument/2006/relationships" r:id="R1c3e5e016c7445a5"/>
+                <a:hlinkClick xmlns:r="http://schemas.openxmlformats.org/officeDocument/2006/relationships" r:id="Re745eb56991e4740"/>
               </a:rPr>
               <a:t>Documento completo · Guía de elaboración del TFG</a:t>
             </a:r>
@@ -15151,7 +15151,7 @@
     </p:spTree>
     <p:extLst>
       <p:ext uri="{BB962C8B-B14F-4D97-AF65-F5344CB8AC3E}">
-        <p14:creationId xmlns:p14="http://schemas.microsoft.com/office/powerpoint/2010/main" val="183874555"/>
+        <p14:creationId xmlns:p14="http://schemas.microsoft.com/office/powerpoint/2010/main" val="1992209226"/>
       </p:ext>
     </p:extLst>
   </p:cSld>
@@ -15182,7 +15182,7 @@
           <p:cNvPr id="10" name="">
             <a:extLst xmlns:a="http://schemas.openxmlformats.org/drawingml/2006/main">
               <a:ext uri="{FF2B5EF4-FFF2-40B4-BE49-F238E27FC236}">
-                <a16:creationId xmlns:a16="http://schemas.microsoft.com/office/drawing/2014/main" id="{7867EAA3-4C77-4795-A02E-B0691EFB7A20}"/>
+                <a16:creationId xmlns:a16="http://schemas.microsoft.com/office/drawing/2014/main" id="{83677A8E-54B3-45A9-8444-C97D0E6CF4B9}"/>
               </a:ext>
             </a:extLst>
           </p:cNvPr>
@@ -15212,7 +15212,7 @@
           <p:cNvPr id="2" name="">
             <a:extLst xmlns:a="http://schemas.openxmlformats.org/drawingml/2006/main">
               <a:ext uri="{FF2B5EF4-FFF2-40B4-BE49-F238E27FC236}">
-                <a16:creationId xmlns:a16="http://schemas.microsoft.com/office/drawing/2014/main" id="{B41CE5A3-BFB0-41F2-8E5A-72C75B9C588C}"/>
+                <a16:creationId xmlns:a16="http://schemas.microsoft.com/office/drawing/2014/main" id="{F8231D54-EF6B-4DEB-BDA3-A167B1F0F504}"/>
               </a:ext>
             </a:extLst>
           </p:cNvPr>
@@ -15242,7 +15242,7 @@
           <p:cNvPr id="3" name="">
             <a:extLst xmlns:a="http://schemas.openxmlformats.org/drawingml/2006/main">
               <a:ext uri="{FF2B5EF4-FFF2-40B4-BE49-F238E27FC236}">
-                <a16:creationId xmlns:a16="http://schemas.microsoft.com/office/drawing/2014/main" id="{87C33A14-EE30-4438-B9B2-401C51FED632}"/>
+                <a16:creationId xmlns:a16="http://schemas.microsoft.com/office/drawing/2014/main" id="{CE0E52C7-1477-4E54-A933-FCCB59E36A26}"/>
               </a:ext>
             </a:extLst>
           </p:cNvPr>
@@ -15299,7 +15299,7 @@
           <p:cNvPr id="4" name="">
             <a:extLst xmlns:a="http://schemas.openxmlformats.org/drawingml/2006/main">
               <a:ext uri="{FF2B5EF4-FFF2-40B4-BE49-F238E27FC236}">
-                <a16:creationId xmlns:a16="http://schemas.microsoft.com/office/drawing/2014/main" id="{FB8C6449-32D6-4D69-9998-9627AFFEC635}"/>
+                <a16:creationId xmlns:a16="http://schemas.microsoft.com/office/drawing/2014/main" id="{6B267DC9-9216-4A33-B360-21C9DCE6E576}"/>
               </a:ext>
             </a:extLst>
           </p:cNvPr>
@@ -15356,7 +15356,7 @@
           <p:cNvPr id="5" name="">
             <a:extLst xmlns:a="http://schemas.openxmlformats.org/drawingml/2006/main">
               <a:ext uri="{FF2B5EF4-FFF2-40B4-BE49-F238E27FC236}">
-                <a16:creationId xmlns:a16="http://schemas.microsoft.com/office/drawing/2014/main" id="{D114EEF3-0AA6-425E-8908-0437DCF570B6}"/>
+                <a16:creationId xmlns:a16="http://schemas.microsoft.com/office/drawing/2014/main" id="{929954D4-E98C-491F-8DDE-78196279A394}"/>
               </a:ext>
             </a:extLst>
           </p:cNvPr>
@@ -15413,7 +15413,7 @@
           <p:cNvPr id="6" name="">
             <a:extLst xmlns:a="http://schemas.openxmlformats.org/drawingml/2006/main">
               <a:ext uri="{FF2B5EF4-FFF2-40B4-BE49-F238E27FC236}">
-                <a16:creationId xmlns:a16="http://schemas.microsoft.com/office/drawing/2014/main" id="{B81507D1-9CA1-46AA-B92A-C86EF4956964}"/>
+                <a16:creationId xmlns:a16="http://schemas.microsoft.com/office/drawing/2014/main" id="{22C13666-8E0C-453B-9FD6-5E9397926A1B}"/>
               </a:ext>
             </a:extLst>
           </p:cNvPr>
@@ -15470,7 +15470,7 @@
           <p:cNvPr id="7" name="">
             <a:extLst xmlns:a="http://schemas.openxmlformats.org/drawingml/2006/main">
               <a:ext uri="{FF2B5EF4-FFF2-40B4-BE49-F238E27FC236}">
-                <a16:creationId xmlns:a16="http://schemas.microsoft.com/office/drawing/2014/main" id="{5342DB50-9B24-4898-8AF9-FBB7E1CB1513}"/>
+                <a16:creationId xmlns:a16="http://schemas.microsoft.com/office/drawing/2014/main" id="{8CAA3538-B28C-47B1-98BF-3E5B72DEDA9D}"/>
               </a:ext>
             </a:extLst>
           </p:cNvPr>
@@ -15531,7 +15531,7 @@
           <p:nvPr/>
         </p:nvPicPr>
         <p:blipFill>
-          <a:blip xmlns:r="http://schemas.openxmlformats.org/officeDocument/2006/relationships" xmlns:a="http://schemas.openxmlformats.org/drawingml/2006/main" r:embed="R38e075f316014372"/>
+          <a:blip xmlns:r="http://schemas.openxmlformats.org/officeDocument/2006/relationships" xmlns:a="http://schemas.openxmlformats.org/drawingml/2006/main" r:embed="R4444c0c636b840e8"/>
           <a:stretch xmlns:a="http://schemas.openxmlformats.org/drawingml/2006/main"/>
         </p:blipFill>
         <p:spPr>
@@ -15549,7 +15549,7 @@
           <p:cNvPr id="9" name="">
             <a:extLst xmlns:a="http://schemas.openxmlformats.org/drawingml/2006/main">
               <a:ext uri="{FF2B5EF4-FFF2-40B4-BE49-F238E27FC236}">
-                <a16:creationId xmlns:a16="http://schemas.microsoft.com/office/drawing/2014/main" id="{06738988-FA3A-4DFA-A5EC-757A6D80D64D}"/>
+                <a16:creationId xmlns:a16="http://schemas.microsoft.com/office/drawing/2014/main" id="{85F65FAB-2FD7-4E40-930B-2D87DF3B33B5}"/>
               </a:ext>
             </a:extLst>
           </p:cNvPr>
@@ -15595,7 +15595,7 @@
                 <a:latin typeface="Arial"/>
                 <a:ea typeface="Arial"/>
                 <a:cs typeface="Arial"/>
-                <a:hlinkClick xmlns:r="http://schemas.openxmlformats.org/officeDocument/2006/relationships" r:id="Ra9f6c4874f154489"/>
+                <a:hlinkClick xmlns:r="http://schemas.openxmlformats.org/officeDocument/2006/relationships" r:id="R50b99a51eba642aa"/>
               </a:rPr>
               <a:t>Andree Gutierrez Suclla (2021) · Figura 95, p. 108 · Ver tesis</a:t>
             </a:r>
@@ -15605,7 +15605,7 @@
     </p:spTree>
     <p:extLst>
       <p:ext uri="{BB962C8B-B14F-4D97-AF65-F5344CB8AC3E}">
-        <p14:creationId xmlns:p14="http://schemas.microsoft.com/office/powerpoint/2010/main" val="855973784"/>
+        <p14:creationId xmlns:p14="http://schemas.microsoft.com/office/powerpoint/2010/main" val="1554030449"/>
       </p:ext>
     </p:extLst>
   </p:cSld>
@@ -15633,10 +15633,10 @@
       </p:grpSpPr>
       <p:sp>
         <p:nvSpPr>
-          <p:cNvPr id="19" name="">
+          <p:cNvPr id="18" name="">
             <a:extLst xmlns:a="http://schemas.openxmlformats.org/drawingml/2006/main">
               <a:ext uri="{FF2B5EF4-FFF2-40B4-BE49-F238E27FC236}">
-                <a16:creationId xmlns:a16="http://schemas.microsoft.com/office/drawing/2014/main" id="{88E05E1E-1923-4869-8BA2-964FF2CE6414}"/>
+                <a16:creationId xmlns:a16="http://schemas.microsoft.com/office/drawing/2014/main" id="{0C2239D7-E5C5-4B71-AB01-E21B288DBECE}"/>
               </a:ext>
             </a:extLst>
           </p:cNvPr>
@@ -15666,7 +15666,7 @@
           <p:cNvPr id="2" name="">
             <a:extLst xmlns:a="http://schemas.openxmlformats.org/drawingml/2006/main">
               <a:ext uri="{FF2B5EF4-FFF2-40B4-BE49-F238E27FC236}">
-                <a16:creationId xmlns:a16="http://schemas.microsoft.com/office/drawing/2014/main" id="{0C635085-ACB5-48F4-BCCA-CBEA9665FC5A}"/>
+                <a16:creationId xmlns:a16="http://schemas.microsoft.com/office/drawing/2014/main" id="{2331BAA7-FC90-43B9-A86E-D0DB005A6592}"/>
               </a:ext>
             </a:extLst>
           </p:cNvPr>
@@ -15696,7 +15696,7 @@
           <p:cNvPr id="3" name="">
             <a:extLst xmlns:a="http://schemas.openxmlformats.org/drawingml/2006/main">
               <a:ext uri="{FF2B5EF4-FFF2-40B4-BE49-F238E27FC236}">
-                <a16:creationId xmlns:a16="http://schemas.microsoft.com/office/drawing/2014/main" id="{76FAE8FC-3211-4450-B341-554F83A6D366}"/>
+                <a16:creationId xmlns:a16="http://schemas.microsoft.com/office/drawing/2014/main" id="{2081225D-4428-45D6-9F4E-7B95A1C136F2}"/>
               </a:ext>
             </a:extLst>
           </p:cNvPr>
@@ -15753,7 +15753,7 @@
           <p:cNvPr id="4" name="">
             <a:extLst xmlns:a="http://schemas.openxmlformats.org/drawingml/2006/main">
               <a:ext uri="{FF2B5EF4-FFF2-40B4-BE49-F238E27FC236}">
-                <a16:creationId xmlns:a16="http://schemas.microsoft.com/office/drawing/2014/main" id="{A37FCC98-5677-4648-9EB5-F175CDD8AAB8}"/>
+                <a16:creationId xmlns:a16="http://schemas.microsoft.com/office/drawing/2014/main" id="{B5DF7D8F-37E8-4CF6-8A26-8EE44809EF36}"/>
               </a:ext>
             </a:extLst>
           </p:cNvPr>
@@ -15810,7 +15810,7 @@
           <p:cNvPr id="5" name="">
             <a:extLst xmlns:a="http://schemas.openxmlformats.org/drawingml/2006/main">
               <a:ext uri="{FF2B5EF4-FFF2-40B4-BE49-F238E27FC236}">
-                <a16:creationId xmlns:a16="http://schemas.microsoft.com/office/drawing/2014/main" id="{FF7A6F74-8E45-42B2-94A9-75FB2724EA29}"/>
+                <a16:creationId xmlns:a16="http://schemas.microsoft.com/office/drawing/2014/main" id="{0900A4EB-E3EB-48A5-9F5E-95433FCEAE95}"/>
               </a:ext>
             </a:extLst>
           </p:cNvPr>
@@ -15867,7 +15867,7 @@
           <p:cNvPr id="6" name="">
             <a:extLst xmlns:a="http://schemas.openxmlformats.org/drawingml/2006/main">
               <a:ext uri="{FF2B5EF4-FFF2-40B4-BE49-F238E27FC236}">
-                <a16:creationId xmlns:a16="http://schemas.microsoft.com/office/drawing/2014/main" id="{6FB8FD5D-DC56-4D6C-BA77-BCC35F6C1B9A}"/>
+                <a16:creationId xmlns:a16="http://schemas.microsoft.com/office/drawing/2014/main" id="{3CBB30CA-F06E-4ECA-9880-9CA64B6BF109}"/>
               </a:ext>
             </a:extLst>
           </p:cNvPr>
@@ -15924,7 +15924,7 @@
           <p:cNvPr id="7" name="">
             <a:extLst xmlns:a="http://schemas.openxmlformats.org/drawingml/2006/main">
               <a:ext uri="{FF2B5EF4-FFF2-40B4-BE49-F238E27FC236}">
-                <a16:creationId xmlns:a16="http://schemas.microsoft.com/office/drawing/2014/main" id="{EB5C1854-9E48-4347-825A-A07062A64703}"/>
+                <a16:creationId xmlns:a16="http://schemas.microsoft.com/office/drawing/2014/main" id="{77314C0B-5EB7-43E0-AE06-FDE63A92161C}"/>
               </a:ext>
             </a:extLst>
           </p:cNvPr>
@@ -15971,7 +15971,7 @@
                 <a:ea typeface="Arial"/>
                 <a:cs typeface="Arial"/>
               </a:rPr>
-              <a:t>CRISP-DM · Si el proyecto se basa en datos</a:t>
+              <a:t>CommonKADS · Conocimiento experto</a:t>
             </a:r>
           </a:p>
         </p:txBody>
@@ -15981,7 +15981,7 @@
           <p:cNvPr id="8" name="">
             <a:extLst xmlns:a="http://schemas.openxmlformats.org/drawingml/2006/main">
               <a:ext uri="{FF2B5EF4-FFF2-40B4-BE49-F238E27FC236}">
-                <a16:creationId xmlns:a16="http://schemas.microsoft.com/office/drawing/2014/main" id="{D64EAD20-9148-4372-810F-F87C40744BE3}"/>
+                <a16:creationId xmlns:a16="http://schemas.microsoft.com/office/drawing/2014/main" id="{71AC64A6-C050-4CCF-9DF3-FD673447D2F3}"/>
               </a:ext>
             </a:extLst>
           </p:cNvPr>
@@ -15993,7 +15993,7 @@
         <p:spPr>
           <a:xfrm xmlns:a="http://schemas.openxmlformats.org/drawingml/2006/main">
             <a:off x="838200" y="1866900"/>
-            <a:ext cx="10477500" cy="590550"/>
+            <a:ext cx="10477500" cy="676275"/>
           </a:xfrm>
           <a:prstGeom xmlns:a="http://schemas.openxmlformats.org/drawingml/2006/main" prst="rect">
             <a:avLst/>
@@ -16028,7 +16028,7 @@
                 <a:ea typeface="Arial"/>
                 <a:cs typeface="Arial"/>
               </a:rPr>
-              <a:t>Comprender y preparar los datos, modelar, evaluar y poner en uso.</a:t>
+              <a:t>La referencia más cercana a esta práctica: representar el conocimiento y validarlo.</a:t>
             </a:r>
           </a:p>
         </p:txBody>
@@ -16038,7 +16038,7 @@
           <p:cNvPr id="9" name="">
             <a:extLst xmlns:a="http://schemas.openxmlformats.org/drawingml/2006/main">
               <a:ext uri="{FF2B5EF4-FFF2-40B4-BE49-F238E27FC236}">
-                <a16:creationId xmlns:a16="http://schemas.microsoft.com/office/drawing/2014/main" id="{A580FB68-1A2A-4DCF-B9F6-BEE0F6A99FAC}"/>
+                <a16:creationId xmlns:a16="http://schemas.microsoft.com/office/drawing/2014/main" id="{3668D120-B0C1-4D02-8EF5-2DDCB903AFD0}"/>
               </a:ext>
             </a:extLst>
           </p:cNvPr>
@@ -16049,7 +16049,7 @@
         </p:nvSpPr>
         <p:spPr>
           <a:xfrm xmlns:a="http://schemas.openxmlformats.org/drawingml/2006/main">
-            <a:off x="838200" y="2466975"/>
+            <a:off x="838200" y="2552700"/>
             <a:ext cx="10477500" cy="333375"/>
           </a:xfrm>
           <a:prstGeom xmlns:a="http://schemas.openxmlformats.org/drawingml/2006/main" prst="rect">
@@ -16085,7 +16085,7 @@
                 <a:ea typeface="Arial"/>
                 <a:cs typeface="Arial"/>
               </a:rPr>
-              <a:t>CommonKADS · Si se basa en conocimiento experto</a:t>
+              <a:t>CRISP-DM · Proyectos basados en datos</a:t>
             </a:r>
           </a:p>
         </p:txBody>
@@ -16095,7 +16095,7 @@
           <p:cNvPr id="10" name="">
             <a:extLst xmlns:a="http://schemas.openxmlformats.org/drawingml/2006/main">
               <a:ext uri="{FF2B5EF4-FFF2-40B4-BE49-F238E27FC236}">
-                <a16:creationId xmlns:a16="http://schemas.microsoft.com/office/drawing/2014/main" id="{29FD0F0C-2C0A-410C-8F23-9EBA50F9D438}"/>
+                <a16:creationId xmlns:a16="http://schemas.microsoft.com/office/drawing/2014/main" id="{E5DA76C6-7347-41B6-B140-5567E9CE6E29}"/>
               </a:ext>
             </a:extLst>
           </p:cNvPr>
@@ -16106,8 +16106,8 @@
         </p:nvSpPr>
         <p:spPr>
           <a:xfrm xmlns:a="http://schemas.openxmlformats.org/drawingml/2006/main">
-            <a:off x="838200" y="2838450"/>
-            <a:ext cx="10477500" cy="590550"/>
+            <a:off x="838200" y="2924175"/>
+            <a:ext cx="10477500" cy="676275"/>
           </a:xfrm>
           <a:prstGeom xmlns:a="http://schemas.openxmlformats.org/drawingml/2006/main" prst="rect">
             <a:avLst/>
@@ -16142,7 +16142,7 @@
                 <a:ea typeface="Arial"/>
                 <a:cs typeface="Arial"/>
               </a:rPr>
-              <a:t>Obtener y representar el conocimiento, diseñar el razonamiento y validarlo.</a:t>
+              <a:t>Comprender y preparar datos, modelar y evaluar; volver atrás cuando sea necesario.</a:t>
             </a:r>
           </a:p>
         </p:txBody>
@@ -16152,7 +16152,7 @@
           <p:cNvPr id="11" name="">
             <a:extLst xmlns:a="http://schemas.openxmlformats.org/drawingml/2006/main">
               <a:ext uri="{FF2B5EF4-FFF2-40B4-BE49-F238E27FC236}">
-                <a16:creationId xmlns:a16="http://schemas.microsoft.com/office/drawing/2014/main" id="{8D4A5418-78E1-4FCD-8153-D2BEDE7730AD}"/>
+                <a16:creationId xmlns:a16="http://schemas.microsoft.com/office/drawing/2014/main" id="{7E09EB9B-EBDC-4CF8-99D8-BC72FB6700BE}"/>
               </a:ext>
             </a:extLst>
           </p:cNvPr>
@@ -16163,7 +16163,7 @@
         </p:nvSpPr>
         <p:spPr>
           <a:xfrm xmlns:a="http://schemas.openxmlformats.org/drawingml/2006/main">
-            <a:off x="838200" y="3438525"/>
+            <a:off x="838200" y="3609975"/>
             <a:ext cx="10477500" cy="333375"/>
           </a:xfrm>
           <a:prstGeom xmlns:a="http://schemas.openxmlformats.org/drawingml/2006/main" prst="rect">
@@ -16199,7 +16199,7 @@
                 <a:ea typeface="Arial"/>
                 <a:cs typeface="Arial"/>
               </a:rPr>
-              <a:t>Desarrollo iterativo con prototipos</a:t>
+              <a:t>Scrum · Trabajo en sprints e incrementos</a:t>
             </a:r>
           </a:p>
         </p:txBody>
@@ -16209,7 +16209,7 @@
           <p:cNvPr id="12" name="">
             <a:extLst xmlns:a="http://schemas.openxmlformats.org/drawingml/2006/main">
               <a:ext uri="{FF2B5EF4-FFF2-40B4-BE49-F238E27FC236}">
-                <a16:creationId xmlns:a16="http://schemas.microsoft.com/office/drawing/2014/main" id="{7442C1D6-46EF-473F-9489-B21EC158415E}"/>
+                <a16:creationId xmlns:a16="http://schemas.microsoft.com/office/drawing/2014/main" id="{9C122D05-B67D-46D3-81C9-DAB03ACD28A3}"/>
               </a:ext>
             </a:extLst>
           </p:cNvPr>
@@ -16220,8 +16220,8 @@
         </p:nvSpPr>
         <p:spPr>
           <a:xfrm xmlns:a="http://schemas.openxmlformats.org/drawingml/2006/main">
-            <a:off x="838200" y="3810000"/>
-            <a:ext cx="10477500" cy="590550"/>
+            <a:off x="838200" y="3981450"/>
+            <a:ext cx="10477500" cy="676275"/>
           </a:xfrm>
           <a:prstGeom xmlns:a="http://schemas.openxmlformats.org/drawingml/2006/main" prst="rect">
             <a:avLst/>
@@ -16256,7 +16256,7 @@
                 <a:ea typeface="Arial"/>
                 <a:cs typeface="Arial"/>
               </a:rPr>
-              <a:t>Construir una versión, probarla y mejorar el modelo y la implementación.</a:t>
+              <a:t>Encaja peor con nuestras fechas. Dos entregas por sí solas no implican aplicar Scrum.</a:t>
             </a:r>
           </a:p>
         </p:txBody>
@@ -16266,7 +16266,7 @@
           <p:cNvPr id="13" name="">
             <a:extLst xmlns:a="http://schemas.openxmlformats.org/drawingml/2006/main">
               <a:ext uri="{FF2B5EF4-FFF2-40B4-BE49-F238E27FC236}">
-                <a16:creationId xmlns:a16="http://schemas.microsoft.com/office/drawing/2014/main" id="{0F44D73E-9565-488D-B8AD-C3CA861284D4}"/>
+                <a16:creationId xmlns:a16="http://schemas.microsoft.com/office/drawing/2014/main" id="{66D6B635-9E57-43C6-BFCC-DD9DA73A70F0}"/>
               </a:ext>
             </a:extLst>
           </p:cNvPr>
@@ -16277,8 +16277,8 @@
         </p:nvSpPr>
         <p:spPr>
           <a:xfrm xmlns:a="http://schemas.openxmlformats.org/drawingml/2006/main">
-            <a:off x="838200" y="4410075"/>
-            <a:ext cx="10477500" cy="333375"/>
+            <a:off x="838200" y="4791075"/>
+            <a:ext cx="10477500" cy="447675"/>
           </a:xfrm>
           <a:prstGeom xmlns:a="http://schemas.openxmlformats.org/drawingml/2006/main" prst="rect">
             <a:avLst/>
@@ -16295,7 +16295,7 @@
           <a:lstStyle xmlns:a="http://schemas.openxmlformats.org/drawingml/2006/main"/>
           <a:p xmlns:a="http://schemas.openxmlformats.org/drawingml/2006/main">
             <a:pPr>
-              <a:defRPr sz="2175" b="1">
+              <a:defRPr sz="2025" b="1">
                 <a:solidFill>
                   <a:srgbClr val="233746"/>
                 </a:solidFill>
@@ -16305,7 +16305,7 @@
               </a:defRPr>
             </a:pPr>
             <a:r>
-              <a:rPr sz="2175" b="1">
+              <a:rPr sz="2025" b="1">
                 <a:solidFill>
                   <a:srgbClr val="233746"/>
                 </a:solidFill>
@@ -16313,7 +16313,7 @@
                 <a:ea typeface="Arial"/>
                 <a:cs typeface="Arial"/>
               </a:rPr>
-              <a:t>Scrum · Encaja peor con nuestras fechas</a:t>
+              <a:t>Los tres enfoques son iterativos: construir, probar y revisar.</a:t>
             </a:r>
           </a:p>
         </p:txBody>
@@ -16323,7 +16323,7 @@
           <p:cNvPr id="14" name="">
             <a:extLst xmlns:a="http://schemas.openxmlformats.org/drawingml/2006/main">
               <a:ext uri="{FF2B5EF4-FFF2-40B4-BE49-F238E27FC236}">
-                <a16:creationId xmlns:a16="http://schemas.microsoft.com/office/drawing/2014/main" id="{8AC90712-3E3F-4D6A-A161-D5829E6ADD82}"/>
+                <a16:creationId xmlns:a16="http://schemas.microsoft.com/office/drawing/2014/main" id="{3281BDAD-8C70-438B-BEAE-A777CC885E98}"/>
               </a:ext>
             </a:extLst>
           </p:cNvPr>
@@ -16334,65 +16334,8 @@
         </p:nvSpPr>
         <p:spPr>
           <a:xfrm xmlns:a="http://schemas.openxmlformats.org/drawingml/2006/main">
-            <a:off x="838200" y="4781550"/>
-            <a:ext cx="10477500" cy="590550"/>
-          </a:xfrm>
-          <a:prstGeom xmlns:a="http://schemas.openxmlformats.org/drawingml/2006/main" prst="rect">
-            <a:avLst/>
-          </a:prstGeom>
-          <a:noFill xmlns:a="http://schemas.openxmlformats.org/drawingml/2006/main"/>
-          <a:ln xmlns:a="http://schemas.openxmlformats.org/drawingml/2006/main" w="0">
-            <a:noFill/>
-          </a:ln>
-        </p:spPr>
-        <p:txBody>
-          <a:bodyPr xmlns:a="http://schemas.openxmlformats.org/drawingml/2006/main">
-            <a:noAutofit/>
-          </a:bodyPr>
-          <a:lstStyle xmlns:a="http://schemas.openxmlformats.org/drawingml/2006/main"/>
-          <a:p xmlns:a="http://schemas.openxmlformats.org/drawingml/2006/main">
-            <a:pPr>
-              <a:defRPr sz="1800" b="0">
-                <a:solidFill>
-                  <a:srgbClr val="233746"/>
-                </a:solidFill>
-                <a:latin typeface="Arial"/>
-                <a:ea typeface="Arial"/>
-                <a:cs typeface="Arial"/>
-              </a:defRPr>
-            </a:pPr>
-            <a:r>
-              <a:rPr sz="1800" b="0">
-                <a:solidFill>
-                  <a:srgbClr val="233746"/>
-                </a:solidFill>
-                <a:latin typeface="Arial"/>
-                <a:ea typeface="Arial"/>
-                <a:cs typeface="Arial"/>
-              </a:rPr>
-              <a:t>Sí aprovechamos el trabajo iterativo: construir, probar y mejorar.</a:t>
-            </a:r>
-          </a:p>
-        </p:txBody>
-      </p:sp>
-      <p:sp>
-        <p:nvSpPr>
-          <p:cNvPr id="15" name="">
-            <a:extLst xmlns:a="http://schemas.openxmlformats.org/drawingml/2006/main">
-              <a:ext uri="{FF2B5EF4-FFF2-40B4-BE49-F238E27FC236}">
-                <a16:creationId xmlns:a16="http://schemas.microsoft.com/office/drawing/2014/main" id="{C66DE789-D8B4-4465-8357-5C2CC91578C0}"/>
-              </a:ext>
-            </a:extLst>
-          </p:cNvPr>
-          <p:cNvSpPr>
-            <a:spLocks xmlns:a="http://schemas.openxmlformats.org/drawingml/2006/main" noGrp="1"/>
-          </p:cNvSpPr>
-          <p:nvPr/>
-        </p:nvSpPr>
-        <p:spPr>
-          <a:xfrm xmlns:a="http://schemas.openxmlformats.org/drawingml/2006/main">
-            <a:off x="838200" y="5514975"/>
-            <a:ext cx="10477500" cy="628650"/>
+            <a:off x="838200" y="5391150"/>
+            <a:ext cx="10477500" cy="714375"/>
           </a:xfrm>
           <a:prstGeom xmlns:a="http://schemas.openxmlformats.org/drawingml/2006/main" prst="rect">
             <a:avLst/>
@@ -16427,17 +16370,40 @@
                 <a:ea typeface="Arial"/>
                 <a:cs typeface="Arial"/>
               </a:rPr>
-              <a:t>Dos hitos: prototipo y entrega final. Se valorará justificar el enfoque, sin exigir Scrum.</a:t>
+              <a:t>Dos hitos del sistema: prototipo y entrega final.</a:t>
+            </a:r>
+          </a:p>
+          <a:p xmlns:a="http://schemas.openxmlformats.org/drawingml/2006/main">
+            <a:pPr>
+              <a:defRPr sz="1950" b="1">
+                <a:solidFill>
+                  <a:srgbClr val="D96B18"/>
+                </a:solidFill>
+                <a:latin typeface="Arial"/>
+                <a:ea typeface="Arial"/>
+                <a:cs typeface="Arial"/>
+              </a:defRPr>
+            </a:pPr>
+            <a:r>
+              <a:rPr sz="1950" b="1">
+                <a:solidFill>
+                  <a:srgbClr val="D96B18"/>
+                </a:solidFill>
+                <a:latin typeface="Arial"/>
+                <a:ea typeface="Arial"/>
+                <a:cs typeface="Arial"/>
+              </a:rPr>
+              <a:t>Se valorará justificar la metodología.</a:t>
             </a:r>
           </a:p>
         </p:txBody>
       </p:sp>
       <p:sp>
         <p:nvSpPr>
-          <p:cNvPr id="16" name="">
+          <p:cNvPr id="15" name="">
             <a:extLst xmlns:a="http://schemas.openxmlformats.org/drawingml/2006/main">
               <a:ext uri="{FF2B5EF4-FFF2-40B4-BE49-F238E27FC236}">
-                <a16:creationId xmlns:a16="http://schemas.microsoft.com/office/drawing/2014/main" id="{82F42A9D-E752-466D-9ED1-55D13DCD04F4}"/>
+                <a16:creationId xmlns:a16="http://schemas.microsoft.com/office/drawing/2014/main" id="{B05DEE13-4E3F-4A5F-A6D7-664946028603}"/>
               </a:ext>
             </a:extLst>
           </p:cNvPr>
@@ -16483,7 +16449,7 @@
                 <a:latin typeface="Arial"/>
                 <a:ea typeface="Arial"/>
                 <a:cs typeface="Arial"/>
-                <a:hlinkClick xmlns:r="http://schemas.openxmlformats.org/officeDocument/2006/relationships" r:id="R24fba22e67194703"/>
+                <a:hlinkClick xmlns:r="http://schemas.openxmlformats.org/officeDocument/2006/relationships" r:id="Rd0ce809273784ae9"/>
               </a:rPr>
               <a:t>CRISP-DM · IBM</a:t>
             </a:r>
@@ -16492,10 +16458,10 @@
       </p:sp>
       <p:sp>
         <p:nvSpPr>
-          <p:cNvPr id="17" name="">
+          <p:cNvPr id="16" name="">
             <a:extLst xmlns:a="http://schemas.openxmlformats.org/drawingml/2006/main">
               <a:ext uri="{FF2B5EF4-FFF2-40B4-BE49-F238E27FC236}">
-                <a16:creationId xmlns:a16="http://schemas.microsoft.com/office/drawing/2014/main" id="{EC4009DF-F0C6-4761-A7BF-4672A9249F64}"/>
+                <a16:creationId xmlns:a16="http://schemas.microsoft.com/office/drawing/2014/main" id="{450BA9FE-6F63-442E-A2E6-3DBACCC433F5}"/>
               </a:ext>
             </a:extLst>
           </p:cNvPr>
@@ -16541,7 +16507,7 @@
                 <a:latin typeface="Arial"/>
                 <a:ea typeface="Arial"/>
                 <a:cs typeface="Arial"/>
-                <a:hlinkClick xmlns:r="http://schemas.openxmlformats.org/officeDocument/2006/relationships" r:id="Rc184de5a502a4baf"/>
+                <a:hlinkClick xmlns:r="http://schemas.openxmlformats.org/officeDocument/2006/relationships" r:id="R411e3cd0f7914698"/>
               </a:rPr>
               <a:t>CommonKADS</a:t>
             </a:r>
@@ -16550,10 +16516,10 @@
       </p:sp>
       <p:sp>
         <p:nvSpPr>
-          <p:cNvPr id="18" name="">
+          <p:cNvPr id="17" name="">
             <a:extLst xmlns:a="http://schemas.openxmlformats.org/drawingml/2006/main">
               <a:ext uri="{FF2B5EF4-FFF2-40B4-BE49-F238E27FC236}">
-                <a16:creationId xmlns:a16="http://schemas.microsoft.com/office/drawing/2014/main" id="{28B057F3-044E-4471-A800-891A2708EA26}"/>
+                <a16:creationId xmlns:a16="http://schemas.microsoft.com/office/drawing/2014/main" id="{FD0B3CBB-E9B1-43E6-90DF-DBEAB1C6082D}"/>
               </a:ext>
             </a:extLst>
           </p:cNvPr>
@@ -16599,7 +16565,7 @@
                 <a:latin typeface="Arial"/>
                 <a:ea typeface="Arial"/>
                 <a:cs typeface="Arial"/>
-                <a:hlinkClick xmlns:r="http://schemas.openxmlformats.org/officeDocument/2006/relationships" r:id="R441bb4ae3a644740"/>
+                <a:hlinkClick xmlns:r="http://schemas.openxmlformats.org/officeDocument/2006/relationships" r:id="R69ce52ef039940ec"/>
               </a:rPr>
               <a:t>Guía Scrum</a:t>
             </a:r>
@@ -16609,7 +16575,7 @@
     </p:spTree>
     <p:extLst>
       <p:ext uri="{BB962C8B-B14F-4D97-AF65-F5344CB8AC3E}">
-        <p14:creationId xmlns:p14="http://schemas.microsoft.com/office/powerpoint/2010/main" val="1910946703"/>
+        <p14:creationId xmlns:p14="http://schemas.microsoft.com/office/powerpoint/2010/main" val="324409458"/>
       </p:ext>
     </p:extLst>
   </p:cSld>
@@ -16640,7 +16606,7 @@
           <p:cNvPr id="10" name="">
             <a:extLst xmlns:a="http://schemas.openxmlformats.org/drawingml/2006/main">
               <a:ext uri="{FF2B5EF4-FFF2-40B4-BE49-F238E27FC236}">
-                <a16:creationId xmlns:a16="http://schemas.microsoft.com/office/drawing/2014/main" id="{6F907C00-C45A-4E59-A015-5A087CF04077}"/>
+                <a16:creationId xmlns:a16="http://schemas.microsoft.com/office/drawing/2014/main" id="{95FE9DB3-823B-41F1-BA36-4839F377ED51}"/>
               </a:ext>
             </a:extLst>
           </p:cNvPr>
@@ -16670,7 +16636,7 @@
           <p:cNvPr id="2" name="">
             <a:extLst xmlns:a="http://schemas.openxmlformats.org/drawingml/2006/main">
               <a:ext uri="{FF2B5EF4-FFF2-40B4-BE49-F238E27FC236}">
-                <a16:creationId xmlns:a16="http://schemas.microsoft.com/office/drawing/2014/main" id="{108B4A4F-C5A6-4D10-93F0-DE907D335DF8}"/>
+                <a16:creationId xmlns:a16="http://schemas.microsoft.com/office/drawing/2014/main" id="{8D007779-F731-4AE2-9E47-069B5CC88131}"/>
               </a:ext>
             </a:extLst>
           </p:cNvPr>
@@ -16700,7 +16666,7 @@
           <p:cNvPr id="3" name="">
             <a:extLst xmlns:a="http://schemas.openxmlformats.org/drawingml/2006/main">
               <a:ext uri="{FF2B5EF4-FFF2-40B4-BE49-F238E27FC236}">
-                <a16:creationId xmlns:a16="http://schemas.microsoft.com/office/drawing/2014/main" id="{5580CC5C-6C38-471D-B01D-5807359E1B85}"/>
+                <a16:creationId xmlns:a16="http://schemas.microsoft.com/office/drawing/2014/main" id="{67B46F0B-8DFF-4E14-B088-D237A84936B8}"/>
               </a:ext>
             </a:extLst>
           </p:cNvPr>
@@ -16757,7 +16723,7 @@
           <p:cNvPr id="4" name="">
             <a:extLst xmlns:a="http://schemas.openxmlformats.org/drawingml/2006/main">
               <a:ext uri="{FF2B5EF4-FFF2-40B4-BE49-F238E27FC236}">
-                <a16:creationId xmlns:a16="http://schemas.microsoft.com/office/drawing/2014/main" id="{353AE122-FFC4-44A6-98C5-9148D772D85D}"/>
+                <a16:creationId xmlns:a16="http://schemas.microsoft.com/office/drawing/2014/main" id="{0DC6DAF8-B048-44DB-9958-8D5D826ABEF2}"/>
               </a:ext>
             </a:extLst>
           </p:cNvPr>
@@ -16814,7 +16780,7 @@
           <p:cNvPr id="5" name="">
             <a:extLst xmlns:a="http://schemas.openxmlformats.org/drawingml/2006/main">
               <a:ext uri="{FF2B5EF4-FFF2-40B4-BE49-F238E27FC236}">
-                <a16:creationId xmlns:a16="http://schemas.microsoft.com/office/drawing/2014/main" id="{A8B85358-65BB-4773-A698-3E70C3E0A445}"/>
+                <a16:creationId xmlns:a16="http://schemas.microsoft.com/office/drawing/2014/main" id="{AEA555E0-6640-4902-8B77-A8D9D3CC4245}"/>
               </a:ext>
             </a:extLst>
           </p:cNvPr>
@@ -16871,7 +16837,7 @@
           <p:cNvPr id="6" name="">
             <a:extLst xmlns:a="http://schemas.openxmlformats.org/drawingml/2006/main">
               <a:ext uri="{FF2B5EF4-FFF2-40B4-BE49-F238E27FC236}">
-                <a16:creationId xmlns:a16="http://schemas.microsoft.com/office/drawing/2014/main" id="{089163C5-A245-4635-A3CE-DA4E01BAB262}"/>
+                <a16:creationId xmlns:a16="http://schemas.microsoft.com/office/drawing/2014/main" id="{8BE694EF-F40D-41B5-85E6-BA16398B054B}"/>
               </a:ext>
             </a:extLst>
           </p:cNvPr>
@@ -16918,7 +16884,7 @@
                 <a:ea typeface="Arial"/>
                 <a:cs typeface="Arial"/>
               </a:rPr>
-              <a:t>Dos incrementos: ejemplo de un invernadero</a:t>
+              <a:t>Dos hitos del sistema: ejemplo de un invernadero</a:t>
             </a:r>
           </a:p>
         </p:txBody>
@@ -16956,7 +16922,7 @@
                           <a:ea typeface="Arial"/>
                           <a:cs typeface="Arial"/>
                         </a:rPr>
-                        <a:t>Incremento</a:t>
+                        <a:t>Hito</a:t>
                       </a:r>
                     </a:p>
                   </a:txBody>
@@ -17152,7 +17118,7 @@
           <p:cNvPr id="8" name="">
             <a:extLst xmlns:a="http://schemas.openxmlformats.org/drawingml/2006/main">
               <a:ext uri="{FF2B5EF4-FFF2-40B4-BE49-F238E27FC236}">
-                <a16:creationId xmlns:a16="http://schemas.microsoft.com/office/drawing/2014/main" id="{7B122290-80D0-429E-90DE-00E6E20A3244}"/>
+                <a16:creationId xmlns:a16="http://schemas.microsoft.com/office/drawing/2014/main" id="{7D79A9A5-1468-4447-AD01-C72E62FFB54A}"/>
               </a:ext>
             </a:extLst>
           </p:cNvPr>
@@ -17209,7 +17175,7 @@
           <p:cNvPr id="9" name="">
             <a:extLst xmlns:a="http://schemas.openxmlformats.org/drawingml/2006/main">
               <a:ext uri="{FF2B5EF4-FFF2-40B4-BE49-F238E27FC236}">
-                <a16:creationId xmlns:a16="http://schemas.microsoft.com/office/drawing/2014/main" id="{8001181B-3A00-421D-9520-9EDB0441540B}"/>
+                <a16:creationId xmlns:a16="http://schemas.microsoft.com/office/drawing/2014/main" id="{60ED4C79-5F61-4B5D-B6A9-42A46675361D}"/>
               </a:ext>
             </a:extLst>
           </p:cNvPr>
@@ -17264,7 +17230,7 @@
     </p:spTree>
     <p:extLst>
       <p:ext uri="{BB962C8B-B14F-4D97-AF65-F5344CB8AC3E}">
-        <p14:creationId xmlns:p14="http://schemas.microsoft.com/office/powerpoint/2010/main" val="1306507549"/>
+        <p14:creationId xmlns:p14="http://schemas.microsoft.com/office/powerpoint/2010/main" val="1206581263"/>
       </p:ext>
     </p:extLst>
   </p:cSld>
